--- a/03-build/pptx/C5_U6_docente.pptx
+++ b/03-build/pptx/C5_U6_docente.pptx
@@ -6645,7 +6645,6 @@
               <a:srgbClr val="E4E3DE"/>
             </a:solidFill>
           </a:ln>
-          <a:effectLst/>
           <a:effectLst>
             <a:outerShdw blurRad="90000" dist="38000" dir="5400000" rotWithShape="0">
               <a:srgbClr val="20242E">
@@ -6969,7 +6968,6 @@
               <a:srgbClr val="E4E3DE"/>
             </a:solidFill>
           </a:ln>
-          <a:effectLst/>
           <a:effectLst>
             <a:outerShdw blurRad="90000" dist="38000" dir="5400000" rotWithShape="0">
               <a:srgbClr val="20242E">
@@ -7293,7 +7291,6 @@
               <a:srgbClr val="E4E3DE"/>
             </a:solidFill>
           </a:ln>
-          <a:effectLst/>
           <a:effectLst>
             <a:outerShdw blurRad="90000" dist="38000" dir="5400000" rotWithShape="0">
               <a:srgbClr val="20242E">
@@ -7617,7 +7614,6 @@
               <a:srgbClr val="E4E3DE"/>
             </a:solidFill>
           </a:ln>
-          <a:effectLst/>
           <a:effectLst>
             <a:outerShdw blurRad="90000" dist="38000" dir="5400000" rotWithShape="0">
               <a:srgbClr val="20242E">
@@ -9400,7 +9396,6 @@
               <a:srgbClr val="1E9E74"/>
             </a:solidFill>
           </a:ln>
-          <a:effectLst/>
           <a:effectLst>
             <a:outerShdw blurRad="90000" dist="38000" dir="5400000" rotWithShape="0">
               <a:srgbClr val="20242E">
@@ -9545,7 +9540,6 @@
               <a:srgbClr val="1E9E74"/>
             </a:solidFill>
           </a:ln>
-          <a:effectLst/>
           <a:effectLst>
             <a:outerShdw blurRad="90000" dist="38000" dir="5400000" rotWithShape="0">
               <a:srgbClr val="20242E">
@@ -9690,7 +9684,6 @@
               <a:srgbClr val="1E9E74"/>
             </a:solidFill>
           </a:ln>
-          <a:effectLst/>
           <a:effectLst>
             <a:outerShdw blurRad="90000" dist="38000" dir="5400000" rotWithShape="0">
               <a:srgbClr val="20242E">
@@ -9835,7 +9828,6 @@
               <a:srgbClr val="1E9E74"/>
             </a:solidFill>
           </a:ln>
-          <a:effectLst/>
           <a:effectLst>
             <a:outerShdw blurRad="90000" dist="38000" dir="5400000" rotWithShape="0">
               <a:srgbClr val="20242E">
@@ -9980,7 +9972,6 @@
               <a:srgbClr val="1E9E74"/>
             </a:solidFill>
           </a:ln>
-          <a:effectLst/>
           <a:effectLst>
             <a:outerShdw blurRad="90000" dist="38000" dir="5400000" rotWithShape="0">
               <a:srgbClr val="20242E">
@@ -10125,7 +10116,6 @@
               <a:srgbClr val="1E9E74"/>
             </a:solidFill>
           </a:ln>
-          <a:effectLst/>
           <a:effectLst>
             <a:outerShdw blurRad="90000" dist="38000" dir="5400000" rotWithShape="0">
               <a:srgbClr val="20242E">
@@ -13683,7 +13673,6 @@
               <a:srgbClr val="E4E3DE"/>
             </a:solidFill>
           </a:ln>
-          <a:effectLst/>
           <a:effectLst>
             <a:outerShdw blurRad="90000" dist="38000" dir="5400000" rotWithShape="0">
               <a:srgbClr val="20242E">
@@ -14362,7 +14351,6 @@
               <a:srgbClr val="1E9E74"/>
             </a:solidFill>
           </a:ln>
-          <a:effectLst/>
           <a:effectLst>
             <a:outerShdw blurRad="90000" dist="38000" dir="5400000" rotWithShape="0">
               <a:srgbClr val="20242E">
@@ -21325,7 +21313,6 @@
               <a:srgbClr val="1E9E74"/>
             </a:solidFill>
           </a:ln>
-          <a:effectLst/>
           <a:effectLst>
             <a:outerShdw blurRad="90000" dist="38000" dir="5400000" rotWithShape="0">
               <a:srgbClr val="20242E">
@@ -21559,7 +21546,6 @@
               <a:srgbClr val="1E9E74"/>
             </a:solidFill>
           </a:ln>
-          <a:effectLst/>
           <a:effectLst>
             <a:outerShdw blurRad="90000" dist="38000" dir="5400000" rotWithShape="0">
               <a:srgbClr val="20242E">
@@ -21793,7 +21779,6 @@
               <a:srgbClr val="1E9E74"/>
             </a:solidFill>
           </a:ln>
-          <a:effectLst/>
           <a:effectLst>
             <a:outerShdw blurRad="90000" dist="38000" dir="5400000" rotWithShape="0">
               <a:srgbClr val="20242E">
@@ -29330,7 +29315,6 @@
               <a:srgbClr val="1E9E74"/>
             </a:solidFill>
           </a:ln>
-          <a:effectLst/>
           <a:effectLst>
             <a:outerShdw blurRad="90000" dist="38000" dir="5400000" rotWithShape="0">
               <a:srgbClr val="20242E">
@@ -29633,7 +29617,6 @@
               <a:srgbClr val="1E9E74"/>
             </a:solidFill>
           </a:ln>
-          <a:effectLst/>
           <a:effectLst>
             <a:outerShdw blurRad="90000" dist="38000" dir="5400000" rotWithShape="0">
               <a:srgbClr val="20242E">
@@ -29936,7 +29919,6 @@
               <a:srgbClr val="1E9E74"/>
             </a:solidFill>
           </a:ln>
-          <a:effectLst/>
           <a:effectLst>
             <a:outerShdw blurRad="90000" dist="38000" dir="5400000" rotWithShape="0">
               <a:srgbClr val="20242E">
@@ -30239,7 +30221,6 @@
               <a:srgbClr val="1E9E74"/>
             </a:solidFill>
           </a:ln>
-          <a:effectLst/>
           <a:effectLst>
             <a:outerShdw blurRad="90000" dist="38000" dir="5400000" rotWithShape="0">
               <a:srgbClr val="20242E">
@@ -30542,7 +30523,6 @@
               <a:srgbClr val="1E9E74"/>
             </a:solidFill>
           </a:ln>
-          <a:effectLst/>
           <a:effectLst>
             <a:outerShdw blurRad="90000" dist="38000" dir="5400000" rotWithShape="0">
               <a:srgbClr val="20242E">
@@ -30845,7 +30825,6 @@
               <a:srgbClr val="157355"/>
             </a:solidFill>
           </a:ln>
-          <a:effectLst/>
           <a:effectLst>
             <a:outerShdw blurRad="90000" dist="38000" dir="5400000" rotWithShape="0">
               <a:srgbClr val="20242E">
@@ -31148,7 +31127,6 @@
               <a:srgbClr val="157355"/>
             </a:solidFill>
           </a:ln>
-          <a:effectLst/>
           <a:effectLst>
             <a:outerShdw blurRad="90000" dist="38000" dir="5400000" rotWithShape="0">
               <a:srgbClr val="20242E">
@@ -31451,7 +31429,6 @@
               <a:srgbClr val="157355"/>
             </a:solidFill>
           </a:ln>
-          <a:effectLst/>
           <a:effectLst>
             <a:outerShdw blurRad="90000" dist="38000" dir="5400000" rotWithShape="0">
               <a:srgbClr val="20242E">
@@ -32278,7 +32255,6 @@
           <a:ln>
             <a:noFill/>
           </a:ln>
-          <a:effectLst/>
           <a:effectLst>
             <a:outerShdw blurRad="90000" dist="38000" dir="5400000" rotWithShape="0">
               <a:srgbClr val="20242E">
@@ -33991,7 +33967,6 @@
           <a:ln>
             <a:noFill/>
           </a:ln>
-          <a:effectLst/>
           <a:effectLst>
             <a:outerShdw blurRad="90000" dist="38000" dir="5400000" rotWithShape="0">
               <a:srgbClr val="20242E">
@@ -34134,7 +34109,6 @@
           <a:ln>
             <a:noFill/>
           </a:ln>
-          <a:effectLst/>
           <a:effectLst>
             <a:outerShdw blurRad="90000" dist="38000" dir="5400000" rotWithShape="0">
               <a:srgbClr val="20242E">
@@ -34277,7 +34251,6 @@
           <a:ln>
             <a:noFill/>
           </a:ln>
-          <a:effectLst/>
           <a:effectLst>
             <a:outerShdw blurRad="90000" dist="38000" dir="5400000" rotWithShape="0">
               <a:srgbClr val="20242E">
@@ -34420,7 +34393,6 @@
           <a:ln>
             <a:noFill/>
           </a:ln>
-          <a:effectLst/>
           <a:effectLst>
             <a:outerShdw blurRad="90000" dist="38000" dir="5400000" rotWithShape="0">
               <a:srgbClr val="20242E">
@@ -34563,7 +34535,6 @@
           <a:ln>
             <a:noFill/>
           </a:ln>
-          <a:effectLst/>
           <a:effectLst>
             <a:outerShdw blurRad="90000" dist="38000" dir="5400000" rotWithShape="0">
               <a:srgbClr val="20242E">
@@ -38823,7 +38794,6 @@
           <a:ln>
             <a:noFill/>
           </a:ln>
-          <a:effectLst/>
           <a:effectLst>
             <a:outerShdw blurRad="90000" dist="38000" dir="5400000" rotWithShape="0">
               <a:srgbClr val="20242E">
@@ -43175,7 +43145,6 @@
               <a:srgbClr val="1E9E74"/>
             </a:solidFill>
           </a:ln>
-          <a:effectLst/>
           <a:effectLst>
             <a:outerShdw blurRad="90000" dist="38000" dir="5400000" rotWithShape="0">
               <a:srgbClr val="20242E">
@@ -43320,7 +43289,6 @@
               <a:srgbClr val="1E9E74"/>
             </a:solidFill>
           </a:ln>
-          <a:effectLst/>
           <a:effectLst>
             <a:outerShdw blurRad="90000" dist="38000" dir="5400000" rotWithShape="0">
               <a:srgbClr val="20242E">
@@ -43465,7 +43433,6 @@
               <a:srgbClr val="1E9E74"/>
             </a:solidFill>
           </a:ln>
-          <a:effectLst/>
           <a:effectLst>
             <a:outerShdw blurRad="90000" dist="38000" dir="5400000" rotWithShape="0">
               <a:srgbClr val="20242E">
@@ -43610,7 +43577,6 @@
               <a:srgbClr val="1E9E74"/>
             </a:solidFill>
           </a:ln>
-          <a:effectLst/>
           <a:effectLst>
             <a:outerShdw blurRad="90000" dist="38000" dir="5400000" rotWithShape="0">
               <a:srgbClr val="20242E">
@@ -43755,7 +43721,6 @@
               <a:srgbClr val="1E9E74"/>
             </a:solidFill>
           </a:ln>
-          <a:effectLst/>
           <a:effectLst>
             <a:outerShdw blurRad="90000" dist="38000" dir="5400000" rotWithShape="0">
               <a:srgbClr val="20242E">
@@ -43900,7 +43865,6 @@
               <a:srgbClr val="1E9E74"/>
             </a:solidFill>
           </a:ln>
-          <a:effectLst/>
           <a:effectLst>
             <a:outerShdw blurRad="90000" dist="38000" dir="5400000" rotWithShape="0">
               <a:srgbClr val="20242E">
@@ -45394,7 +45358,6 @@
               <a:srgbClr val="1E9E74"/>
             </a:solidFill>
           </a:ln>
-          <a:effectLst/>
           <a:effectLst>
             <a:outerShdw blurRad="90000" dist="38000" dir="5400000" rotWithShape="0">
               <a:srgbClr val="20242E">
@@ -45549,7 +45512,6 @@
               <a:srgbClr val="B7860B"/>
             </a:solidFill>
           </a:ln>
-          <a:effectLst/>
           <a:effectLst>
             <a:outerShdw blurRad="90000" dist="38000" dir="5400000" rotWithShape="0">
               <a:srgbClr val="20242E">
@@ -45704,7 +45666,6 @@
               <a:srgbClr val="1E9E74"/>
             </a:solidFill>
           </a:ln>
-          <a:effectLst/>
           <a:effectLst>
             <a:outerShdw blurRad="90000" dist="38000" dir="5400000" rotWithShape="0">
               <a:srgbClr val="20242E">
@@ -45859,7 +45820,6 @@
               <a:srgbClr val="B7860B"/>
             </a:solidFill>
           </a:ln>
-          <a:effectLst/>
           <a:effectLst>
             <a:outerShdw blurRad="90000" dist="38000" dir="5400000" rotWithShape="0">
               <a:srgbClr val="20242E">
@@ -46014,7 +45974,6 @@
               <a:srgbClr val="1E9E74"/>
             </a:solidFill>
           </a:ln>
-          <a:effectLst/>
           <a:effectLst>
             <a:outerShdw blurRad="90000" dist="38000" dir="5400000" rotWithShape="0">
               <a:srgbClr val="20242E">
@@ -46169,7 +46128,6 @@
               <a:srgbClr val="B7860B"/>
             </a:solidFill>
           </a:ln>
-          <a:effectLst/>
           <a:effectLst>
             <a:outerShdw blurRad="90000" dist="38000" dir="5400000" rotWithShape="0">
               <a:srgbClr val="20242E">
@@ -49868,7 +49826,6 @@
               <a:srgbClr val="1E9E74"/>
             </a:solidFill>
           </a:ln>
-          <a:effectLst/>
           <a:effectLst>
             <a:outerShdw blurRad="90000" dist="38000" dir="5400000" rotWithShape="0">
               <a:srgbClr val="20242E">

--- a/03-build/pptx/C5_U6_docente.pptx
+++ b/03-build/pptx/C5_U6_docente.pptx
@@ -11,6 +11,9 @@
     <p:sldId id="259" r:id="rId11"/>
     <p:sldId id="260" r:id="rId12"/>
     <p:sldId id="261" r:id="rId13"/>
+    <p:sldId id="277" r:id="rId29"/>
+    <p:sldId id="278" r:id="rId30"/>
+    <p:sldId id="279" r:id="rId31"/>
     <p:sldId id="262" r:id="rId14"/>
     <p:sldId id="263" r:id="rId15"/>
     <p:sldId id="264" r:id="rId16"/>
@@ -1551,6 +1554,255 @@
           </p:nvPr>
         </p:nvSpPr>
         <p:spPr/>
+      </p:sp>
+    </p:spTree>
+  </p:cSld>
+  <p:clrMapOvr>
+    <a:masterClrMapping/>
+  </p:clrMapOvr>
+</p:notes>
+</file>
+
+<file path=ppt/notesSlides/notesSlide22.xml><?xml version="1.0" encoding="utf-8"?>
+<p:notes xmlns:a="http://schemas.openxmlformats.org/drawingml/2006/main" xmlns:p="http://schemas.openxmlformats.org/presentationml/2006/main" xmlns:r="http://schemas.openxmlformats.org/officeDocument/2006/relationships">
+  <p:cSld>
+    <p:spTree>
+      <p:nvGrpSpPr>
+        <p:cNvPr id="1" name=""/>
+        <p:cNvGrpSpPr/>
+        <p:nvPr/>
+      </p:nvGrpSpPr>
+      <p:grpSpPr>
+        <a:xfrm>
+          <a:off x="0" y="0"/>
+          <a:ext cx="0" cy="0"/>
+          <a:chOff x="0" y="0"/>
+          <a:chExt cx="0" cy="0"/>
+        </a:xfrm>
+      </p:grpSpPr>
+      <p:sp>
+        <p:nvSpPr>
+          <p:cNvPr id="2" name="Slide Image Placeholder 1"/>
+          <p:cNvSpPr>
+            <a:spLocks noGrp="1"/>
+          </p:cNvSpPr>
+          <p:nvPr>
+            <p:ph type="sldImg" idx="2"/>
+          </p:nvPr>
+        </p:nvSpPr>
+        <p:spPr/>
+      </p:sp>
+      <p:sp>
+        <p:nvSpPr>
+          <p:cNvPr id="3" name="Notes Placeholder 2"/>
+          <p:cNvSpPr>
+            <a:spLocks noGrp="1"/>
+          </p:cNvSpPr>
+          <p:nvPr>
+            <p:ph type="body" idx="3" sz="quarter"/>
+          </p:nvPr>
+        </p:nvSpPr>
+        <p:spPr/>
+        <p:txBody>
+          <a:bodyPr/>
+          <a:lstStyle/>
+          <a:p>
+            <a:r>
+              <a:t>RETO 1 · El regateo — ⚖️ onderhandeling &amp; dilemma</a:t>
+            </a:r>
+          </a:p>
+          <a:p>
+            <a:r>
+              <a:t>OPDRACHT: Onderhandel tot jullie een deal hebben. Ieder heeft een geheime grens.</a:t>
+            </a:r>
+          </a:p>
+          <a:p>
+            <a:r>
+              <a:t>DE REGEL: De verkoper mag niet onder zijn bodemprijs, de koper niet boven zijn budget. En elk nieuw bod moet met een reden komen — een getal alleen telt niet.</a:t>
+            </a:r>
+          </a:p>
+          <a:p>
+            <a:r>
+              <a:t>VERLOOP: Coge tu tarjeta: precio mínimo o presupuesto. | El vendedor empieza. Siempre alto. | Regatead con razones, no solo con números. | ¿No hay trato? También es un resultado.</a:t>
+            </a:r>
+          </a:p>
+          <a:p>
+            <a:r>
+              <a:t>SLEUTEL: Getallen zijn (vraagprijs, bodemprijs) in peso's. Een deal ligt altijd tussen de bodemprijs en het budget van de koper.  ||  De pronomina zitten in de formules: «se lo dejo en…», «me lo llevo». Wijs erop dat onderhandelen in het Spaans bijna niet kan zonder.  ||  «No puedo bajar más» is het sluitstuk: wie het te vroeg zegt, verliest zijn ruimte.</a:t>
+            </a:r>
+          </a:p>
+          <a:p>
+            <a:r>
+              <a:t>NOTA: Afdingen is op Mexicaanse markten gebruikelijk in ambachtelijke kramen, niet in winkels met vaste prijzen. Zeg dat erbij, anders leren leerlingen het verkeerd.</a:t>
+            </a:r>
+          </a:p>
+        </p:txBody>
+      </p:sp>
+    </p:spTree>
+  </p:cSld>
+  <p:clrMapOvr>
+    <a:masterClrMapping/>
+  </p:clrMapOvr>
+</p:notes>
+</file>
+
+<file path=ppt/notesSlides/notesSlide23.xml><?xml version="1.0" encoding="utf-8"?>
+<p:notes xmlns:a="http://schemas.openxmlformats.org/drawingml/2006/main" xmlns:p="http://schemas.openxmlformats.org/presentationml/2006/main" xmlns:r="http://schemas.openxmlformats.org/officeDocument/2006/relationships">
+  <p:cSld>
+    <p:spTree>
+      <p:nvGrpSpPr>
+        <p:cNvPr id="1" name=""/>
+        <p:cNvGrpSpPr/>
+        <p:nvPr/>
+      </p:nvGrpSpPr>
+      <p:grpSpPr>
+        <a:xfrm>
+          <a:off x="0" y="0"/>
+          <a:ext cx="0" cy="0"/>
+          <a:chOff x="0" y="0"/>
+          <a:chExt cx="0" cy="0"/>
+        </a:xfrm>
+      </p:grpSpPr>
+      <p:sp>
+        <p:nvSpPr>
+          <p:cNvPr id="2" name="Slide Image Placeholder 1"/>
+          <p:cNvSpPr>
+            <a:spLocks noGrp="1"/>
+          </p:cNvSpPr>
+          <p:nvPr>
+            <p:ph type="sldImg" idx="2"/>
+          </p:nvPr>
+        </p:nvSpPr>
+        <p:spPr/>
+      </p:sp>
+      <p:sp>
+        <p:nvSpPr>
+          <p:cNvPr id="3" name="Notes Placeholder 2"/>
+          <p:cNvSpPr>
+            <a:spLocks noGrp="1"/>
+          </p:cNvSpPr>
+          <p:nvPr>
+            <p:ph type="body" idx="3" sz="quarter"/>
+          </p:nvPr>
+        </p:nvSpPr>
+        <p:spPr/>
+        <p:txBody>
+          <a:bodyPr/>
+          <a:lstStyle/>
+          <a:p>
+            <a:r>
+              <a:t>RETO 2 · Devolución imposible — 🎭 simulatie met beperking</a:t>
+            </a:r>
+          </a:p>
+          <a:p>
+            <a:r>
+              <a:t>OPDRACHT: Krijg de ruil rond. De verkoper heeft drie weigeringen en jij drie argumenten.</a:t>
+            </a:r>
+          </a:p>
+          <a:p>
+            <a:r>
+              <a:t>DE REGEL: Je mag elk argument maar één keer gebruiken. Op wie in herhaling valt, hoeft de verkoper niet meer te antwoorden.</a:t>
+            </a:r>
+          </a:p>
+          <a:p>
+            <a:r>
+              <a:t>VERLOOP: El cliente explica el problema. | El vendedor dice que no. Primera negativa. | El cliente usa su siguiente argumento. | ¿Cambio, vale de tienda o nada?</a:t>
+            </a:r>
+          </a:p>
+          <a:p>
+            <a:r>
+              <a:t>SLEUTEL: Het sterkste argument is het derde: wie alleen een andere maat vraagt, ontwijkt het hele bonverhaal. Laat leerlingen dat zelf ontdekken.  ||  Alle drie de weigeringen en alle drie de argumenten bevatten een pronomen — dat is geen toeval maar het doel van de unit.  ||  «Vale para la tienda» is de realistische uitkomst en een prima compromis.</a:t>
+            </a:r>
+          </a:p>
+          <a:p>
+            <a:r>
+              <a:t>NOTA: Wissel de rollen halverwege. De verkoperrol oefent meer dan de klantrol, omdat die moet reageren op wat er komt.</a:t>
+            </a:r>
+          </a:p>
+        </p:txBody>
+      </p:sp>
+    </p:spTree>
+  </p:cSld>
+  <p:clrMapOvr>
+    <a:masterClrMapping/>
+  </p:clrMapOvr>
+</p:notes>
+</file>
+
+<file path=ppt/notesSlides/notesSlide24.xml><?xml version="1.0" encoding="utf-8"?>
+<p:notes xmlns:a="http://schemas.openxmlformats.org/drawingml/2006/main" xmlns:p="http://schemas.openxmlformats.org/presentationml/2006/main" xmlns:r="http://schemas.openxmlformats.org/officeDocument/2006/relationships">
+  <p:cSld>
+    <p:spTree>
+      <p:nvGrpSpPr>
+        <p:cNvPr id="1" name=""/>
+        <p:cNvGrpSpPr/>
+        <p:nvPr/>
+      </p:nvGrpSpPr>
+      <p:grpSpPr>
+        <a:xfrm>
+          <a:off x="0" y="0"/>
+          <a:ext cx="0" cy="0"/>
+          <a:chOff x="0" y="0"/>
+          <a:chExt cx="0" cy="0"/>
+        </a:xfrm>
+      </p:grpSpPr>
+      <p:sp>
+        <p:nvSpPr>
+          <p:cNvPr id="2" name="Slide Image Placeholder 1"/>
+          <p:cNvSpPr>
+            <a:spLocks noGrp="1"/>
+          </p:cNvSpPr>
+          <p:nvPr>
+            <p:ph type="sldImg" idx="2"/>
+          </p:nvPr>
+        </p:nvSpPr>
+        <p:spPr/>
+      </p:sp>
+      <p:sp>
+        <p:nvSpPr>
+          <p:cNvPr id="3" name="Notes Placeholder 2"/>
+          <p:cNvSpPr>
+            <a:spLocks noGrp="1"/>
+          </p:cNvSpPr>
+          <p:nvPr>
+            <p:ph type="body" idx="3" sz="quarter"/>
+          </p:nvPr>
+        </p:nvSpPr>
+        <p:spPr/>
+        <p:txBody>
+          <a:bodyPr/>
+          <a:lstStyle/>
+          <a:p>
+            <a:r>
+              <a:t>RETO 8 · El cliente imposible — 🎭 simulatie met beperking</a:t>
+            </a:r>
+          </a:p>
+          <a:p>
+            <a:r>
+              <a:t>OPDRACHT: Speel je type zonder het te zeggen. De verkoper raadt op het einde.</a:t>
+            </a:r>
+          </a:p>
+          <a:p>
+            <a:r>
+              <a:t>DE REGEL: Je mag je type niet benoemen en niet overdrijven tot karikatuur. Het moet uit je vragen en je reacties blijken.</a:t>
+            </a:r>
+          </a:p>
+          <a:p>
+            <a:r>
+              <a:t>VERLOOP: Coge tu tarjeta de tipo. En secreto. | Comprad algo. Cinco turnos como máximo. | El vendedor dice qué tipo cree que eres. | ¿Acierta? Cambiad de papel.</a:t>
+            </a:r>
+          </a:p>
+          <a:p>
+            <a:r>
+              <a:t>SLEUTEL: «El que va a regalar» is het makkelijkst te raden (die vraagt naar andermans maat), «el desconfiado» het moeilijkst.  ||  De verkoper oefent hier het meest: die moet vijf beurten lang blijven aanbieden met pronomina.  ||  Overdrijven bederft het spel én de taal: wie karikaturaal speelt, hoeft geen zinnen meer te bouwen.</a:t>
+            </a:r>
+          </a:p>
+          <a:p>
+            <a:r>
+              <a:t>NOTA: Vijf beurten is genoeg. Langer en de klant valt uit zijn rol.</a:t>
+            </a:r>
+          </a:p>
+        </p:txBody>
       </p:sp>
     </p:spTree>
   </p:cSld>
@@ -34839,6 +35091,4769 @@
                 <a:latin typeface="Inter"/>
               </a:rPr>
               <a:t>21</a:t>
+            </a:r>
+          </a:p>
+        </p:txBody>
+      </p:sp>
+    </p:spTree>
+  </p:cSld>
+  <p:clrMapOvr>
+    <a:masterClrMapping/>
+  </p:clrMapOvr>
+</p:sld>
+</file>
+
+<file path=ppt/slides/slide22.xml><?xml version="1.0" encoding="utf-8"?>
+<p:sld xmlns:a="http://schemas.openxmlformats.org/drawingml/2006/main" xmlns:p="http://schemas.openxmlformats.org/presentationml/2006/main" xmlns:r="http://schemas.openxmlformats.org/officeDocument/2006/relationships">
+  <p:cSld>
+    <p:spTree>
+      <p:nvGrpSpPr>
+        <p:cNvPr id="1" name=""/>
+        <p:cNvGrpSpPr/>
+        <p:nvPr/>
+      </p:nvGrpSpPr>
+      <p:grpSpPr/>
+      <p:sp>
+        <p:nvSpPr>
+          <p:cNvPr id="2" name="Fondo"/>
+          <p:cNvSpPr/>
+          <p:nvPr/>
+        </p:nvSpPr>
+        <p:spPr>
+          <a:xfrm>
+            <a:off x="0" y="0"/>
+            <a:ext cx="12191695" cy="6858000"/>
+          </a:xfrm>
+          <a:prstGeom prst="rect">
+            <a:avLst/>
+          </a:prstGeom>
+          <a:solidFill>
+            <a:srgbClr val="FCFBF8"/>
+          </a:solidFill>
+          <a:ln>
+            <a:noFill/>
+          </a:ln>
+          <a:effectLst/>
+        </p:spPr>
+        <p:style>
+          <a:lnRef idx="1">
+            <a:schemeClr val="accent1"/>
+          </a:lnRef>
+          <a:fillRef idx="3">
+            <a:schemeClr val="accent1"/>
+          </a:fillRef>
+          <a:effectRef idx="2">
+            <a:schemeClr val="accent1"/>
+          </a:effectRef>
+          <a:fontRef idx="minor">
+            <a:schemeClr val="lt1"/>
+          </a:fontRef>
+        </p:style>
+        <p:txBody>
+          <a:bodyPr rtlCol="0" anchor="ctr"/>
+          <a:lstStyle/>
+          <a:p/>
+        </p:txBody>
+      </p:sp>
+      <p:sp>
+        <p:nvSpPr>
+          <p:cNvPr id="3" name="Cabecera"/>
+          <p:cNvSpPr/>
+          <p:nvPr/>
+        </p:nvSpPr>
+        <p:spPr>
+          <a:xfrm>
+            <a:off x="0" y="0"/>
+            <a:ext cx="12191695" cy="1078992"/>
+          </a:xfrm>
+          <a:prstGeom prst="rect">
+            <a:avLst/>
+          </a:prstGeom>
+          <a:solidFill>
+            <a:srgbClr val="1E9E74"/>
+          </a:solidFill>
+          <a:ln>
+            <a:noFill/>
+          </a:ln>
+          <a:effectLst/>
+        </p:spPr>
+        <p:style>
+          <a:lnRef idx="1">
+            <a:schemeClr val="accent1"/>
+          </a:lnRef>
+          <a:fillRef idx="3">
+            <a:schemeClr val="accent1"/>
+          </a:fillRef>
+          <a:effectRef idx="2">
+            <a:schemeClr val="accent1"/>
+          </a:effectRef>
+          <a:fontRef idx="minor">
+            <a:schemeClr val="lt1"/>
+          </a:fontRef>
+        </p:style>
+        <p:txBody>
+          <a:bodyPr rtlCol="0" anchor="ctr"/>
+          <a:lstStyle/>
+          <a:p/>
+        </p:txBody>
+      </p:sp>
+      <p:sp>
+        <p:nvSpPr>
+          <p:cNvPr id="4" name="Chip"/>
+          <p:cNvSpPr/>
+          <p:nvPr/>
+        </p:nvSpPr>
+        <p:spPr>
+          <a:xfrm>
+            <a:off x="457200" y="182880"/>
+            <a:ext cx="3017520" cy="292608"/>
+          </a:xfrm>
+          <a:prstGeom prst="roundRect">
+            <a:avLst>
+              <a:gd name="adj" fmla="val 50000"/>
+            </a:avLst>
+          </a:prstGeom>
+          <a:solidFill>
+            <a:srgbClr val="FFFFFF"/>
+          </a:solidFill>
+          <a:ln>
+            <a:noFill/>
+          </a:ln>
+          <a:effectLst/>
+        </p:spPr>
+        <p:style>
+          <a:lnRef idx="1">
+            <a:schemeClr val="accent1"/>
+          </a:lnRef>
+          <a:fillRef idx="3">
+            <a:schemeClr val="accent1"/>
+          </a:fillRef>
+          <a:effectRef idx="2">
+            <a:schemeClr val="accent1"/>
+          </a:effectRef>
+          <a:fontRef idx="minor">
+            <a:schemeClr val="lt1"/>
+          </a:fontRef>
+        </p:style>
+        <p:txBody>
+          <a:bodyPr rtlCol="0" anchor="ctr"/>
+          <a:lstStyle/>
+          <a:p/>
+        </p:txBody>
+      </p:sp>
+      <p:sp>
+        <p:nvSpPr>
+          <p:cNvPr id="5" name="ChipTxt"/>
+          <p:cNvSpPr txBox="1"/>
+          <p:nvPr/>
+        </p:nvSpPr>
+        <p:spPr>
+          <a:xfrm>
+            <a:off x="457200" y="173736"/>
+            <a:ext cx="3017520" cy="310896"/>
+          </a:xfrm>
+          <a:prstGeom prst="rect">
+            <a:avLst/>
+          </a:prstGeom>
+          <a:noFill/>
+        </p:spPr>
+        <p:txBody>
+          <a:bodyPr wrap="square" anchor="ctr" lIns="45720" rIns="45720" tIns="27432" bIns="27432">
+            <a:normAutofit/>
+          </a:bodyPr>
+          <a:lstStyle/>
+          <a:p>
+            <a:pPr algn="ctr"/>
+            <a:r>
+              <a:rPr sz="950" b="1">
+                <a:solidFill>
+                  <a:srgbClr val="157355"/>
+                </a:solidFill>
+                <a:latin typeface="Inter"/>
+              </a:rPr>
+              <a:t>RETO 1 · ONDERHANDELING &amp; DILEMMA</a:t>
+            </a:r>
+          </a:p>
+        </p:txBody>
+      </p:sp>
+      <p:sp>
+        <p:nvSpPr>
+          <p:cNvPr id="6" name="Titulo"/>
+          <p:cNvSpPr txBox="1"/>
+          <p:nvPr/>
+        </p:nvSpPr>
+        <p:spPr>
+          <a:xfrm>
+            <a:off x="457200" y="502920"/>
+            <a:ext cx="8412480" cy="475488"/>
+          </a:xfrm>
+          <a:prstGeom prst="rect">
+            <a:avLst/>
+          </a:prstGeom>
+          <a:noFill/>
+        </p:spPr>
+        <p:txBody>
+          <a:bodyPr wrap="square" anchor="t" lIns="45720" rIns="45720" tIns="27432" bIns="27432">
+            <a:normAutofit/>
+          </a:bodyPr>
+          <a:lstStyle/>
+          <a:p>
+            <a:pPr algn="l"/>
+            <a:r>
+              <a:rPr sz="2700" b="1">
+                <a:solidFill>
+                  <a:srgbClr val="FFFFFF"/>
+                </a:solidFill>
+                <a:latin typeface="Bricolage Grotesque"/>
+              </a:rPr>
+              <a:t>El regateo</a:t>
+            </a:r>
+          </a:p>
+        </p:txBody>
+      </p:sp>
+      <p:sp>
+        <p:nvSpPr>
+          <p:cNvPr id="7" name="Badges"/>
+          <p:cNvSpPr txBox="1"/>
+          <p:nvPr/>
+        </p:nvSpPr>
+        <p:spPr>
+          <a:xfrm>
+            <a:off x="9052560" y="256032"/>
+            <a:ext cx="2651760" cy="640080"/>
+          </a:xfrm>
+          <a:prstGeom prst="rect">
+            <a:avLst/>
+          </a:prstGeom>
+          <a:noFill/>
+        </p:spPr>
+        <p:txBody>
+          <a:bodyPr wrap="square" anchor="t" lIns="45720" rIns="45720" tIns="27432" bIns="27432">
+            <a:normAutofit/>
+          </a:bodyPr>
+          <a:lstStyle/>
+          <a:p>
+            <a:pPr algn="r"/>
+            <a:r>
+              <a:rPr sz="1000">
+                <a:solidFill>
+                  <a:srgbClr val="E4F4EE"/>
+                </a:solidFill>
+                <a:latin typeface="Inter"/>
+              </a:rPr>
+              <a:t>👥 En parejas</a:t>
+            </a:r>
+          </a:p>
+          <a:p>
+            <a:pPr algn="r"/>
+            <a:r>
+              <a:rPr sz="1000">
+                <a:solidFill>
+                  <a:srgbClr val="E4F4EE"/>
+                </a:solidFill>
+                <a:latin typeface="Inter"/>
+              </a:rPr>
+              <a:t>± 15 min · ★★★</a:t>
+            </a:r>
+          </a:p>
+        </p:txBody>
+      </p:sp>
+      <p:sp>
+        <p:nvSpPr>
+          <p:cNvPr id="8" name="Gancho"/>
+          <p:cNvSpPr txBox="1"/>
+          <p:nvPr/>
+        </p:nvSpPr>
+        <p:spPr>
+          <a:xfrm>
+            <a:off x="457200" y="1225296"/>
+            <a:ext cx="11274552" cy="566928"/>
+          </a:xfrm>
+          <a:prstGeom prst="rect">
+            <a:avLst/>
+          </a:prstGeom>
+          <a:noFill/>
+        </p:spPr>
+        <p:txBody>
+          <a:bodyPr wrap="square" anchor="t" lIns="45720" rIns="45720" tIns="27432" bIns="27432">
+            <a:normAutofit/>
+          </a:bodyPr>
+          <a:lstStyle/>
+          <a:p>
+            <a:pPr algn="l"/>
+            <a:r>
+              <a:rPr sz="1600" b="1">
+                <a:solidFill>
+                  <a:srgbClr val="157355"/>
+                </a:solidFill>
+                <a:latin typeface="Bricolage Grotesque"/>
+              </a:rPr>
+              <a:t>En el mercado el primer precio nunca es el precio.</a:t>
+            </a:r>
+          </a:p>
+          <a:p>
+            <a:pPr algn="l"/>
+            <a:r>
+              <a:rPr sz="1100" i="1">
+                <a:solidFill>
+                  <a:srgbClr val="6A6E78"/>
+                </a:solidFill>
+                <a:latin typeface="Inter"/>
+              </a:rPr>
+              <a:t>Op de markt is de eerste prijs nooit de prijs.</a:t>
+            </a:r>
+          </a:p>
+        </p:txBody>
+      </p:sp>
+      <p:sp>
+        <p:nvSpPr>
+          <p:cNvPr id="9" name="ReglaCaja"/>
+          <p:cNvSpPr/>
+          <p:nvPr/>
+        </p:nvSpPr>
+        <p:spPr>
+          <a:xfrm>
+            <a:off x="457200" y="1847088"/>
+            <a:ext cx="11274552" cy="658368"/>
+          </a:xfrm>
+          <a:prstGeom prst="roundRect">
+            <a:avLst>
+              <a:gd name="adj" fmla="val 5000"/>
+            </a:avLst>
+          </a:prstGeom>
+          <a:solidFill>
+            <a:srgbClr val="FBF3D6"/>
+          </a:solidFill>
+          <a:ln>
+            <a:noFill/>
+          </a:ln>
+          <a:effectLst/>
+        </p:spPr>
+        <p:style>
+          <a:lnRef idx="1">
+            <a:schemeClr val="accent1"/>
+          </a:lnRef>
+          <a:fillRef idx="3">
+            <a:schemeClr val="accent1"/>
+          </a:fillRef>
+          <a:effectRef idx="2">
+            <a:schemeClr val="accent1"/>
+          </a:effectRef>
+          <a:fontRef idx="minor">
+            <a:schemeClr val="lt1"/>
+          </a:fontRef>
+        </p:style>
+        <p:txBody>
+          <a:bodyPr rtlCol="0" anchor="ctr"/>
+          <a:lstStyle/>
+          <a:p/>
+        </p:txBody>
+      </p:sp>
+      <p:sp>
+        <p:nvSpPr>
+          <p:cNvPr id="10" name="ReglaTxt"/>
+          <p:cNvSpPr txBox="1"/>
+          <p:nvPr/>
+        </p:nvSpPr>
+        <p:spPr>
+          <a:xfrm>
+            <a:off x="603504" y="1883664"/>
+            <a:ext cx="10972800" cy="585216"/>
+          </a:xfrm>
+          <a:prstGeom prst="rect">
+            <a:avLst/>
+          </a:prstGeom>
+          <a:noFill/>
+        </p:spPr>
+        <p:txBody>
+          <a:bodyPr wrap="square" anchor="t" lIns="45720" rIns="45720" tIns="27432" bIns="27432">
+            <a:normAutofit/>
+          </a:bodyPr>
+          <a:lstStyle/>
+          <a:p>
+            <a:pPr algn="l"/>
+            <a:r>
+              <a:rPr sz="850" b="1">
+                <a:solidFill>
+                  <a:srgbClr val="B7860B"/>
+                </a:solidFill>
+                <a:latin typeface="Inter"/>
+              </a:rPr>
+              <a:t>LA REGLA DEL RETO</a:t>
+            </a:r>
+          </a:p>
+          <a:p>
+            <a:pPr algn="l"/>
+            <a:r>
+              <a:rPr sz="1100">
+                <a:solidFill>
+                  <a:srgbClr val="20242E"/>
+                </a:solidFill>
+                <a:latin typeface="Inter"/>
+              </a:rPr>
+              <a:t>De verkoper mag niet onder zijn bodemprijs, de koper niet boven zijn budget. En elk nieuw bod moet met een reden komen — een getal alleen telt niet.</a:t>
+            </a:r>
+          </a:p>
+        </p:txBody>
+      </p:sp>
+      <p:sp>
+        <p:nvSpPr>
+          <p:cNvPr id="11" name="Tarjeta 0"/>
+          <p:cNvSpPr/>
+          <p:nvPr/>
+        </p:nvSpPr>
+        <p:spPr>
+          <a:xfrm>
+            <a:off x="457200" y="2670048"/>
+            <a:ext cx="2708910" cy="1170432"/>
+          </a:xfrm>
+          <a:prstGeom prst="roundRect">
+            <a:avLst>
+              <a:gd name="adj" fmla="val 6000"/>
+            </a:avLst>
+          </a:prstGeom>
+          <a:solidFill>
+            <a:srgbClr val="FFFFFF"/>
+          </a:solidFill>
+          <a:ln w="12700">
+            <a:solidFill>
+              <a:srgbClr val="E4E3DE"/>
+            </a:solidFill>
+          </a:ln>
+          <a:effectLst/>
+        </p:spPr>
+        <p:style>
+          <a:lnRef idx="1">
+            <a:schemeClr val="accent1"/>
+          </a:lnRef>
+          <a:fillRef idx="3">
+            <a:schemeClr val="accent1"/>
+          </a:fillRef>
+          <a:effectRef idx="2">
+            <a:schemeClr val="accent1"/>
+          </a:effectRef>
+          <a:fontRef idx="minor">
+            <a:schemeClr val="lt1"/>
+          </a:fontRef>
+        </p:style>
+        <p:txBody>
+          <a:bodyPr rtlCol="0" anchor="ctr"/>
+          <a:lstStyle/>
+          <a:p/>
+        </p:txBody>
+      </p:sp>
+      <p:sp>
+        <p:nvSpPr>
+          <p:cNvPr id="12" name="TarjetaTxt 0"/>
+          <p:cNvSpPr txBox="1"/>
+          <p:nvPr/>
+        </p:nvSpPr>
+        <p:spPr>
+          <a:xfrm>
+            <a:off x="548640" y="2724912"/>
+            <a:ext cx="2526030" cy="859536"/>
+          </a:xfrm>
+          <a:prstGeom prst="rect">
+            <a:avLst/>
+          </a:prstGeom>
+          <a:noFill/>
+        </p:spPr>
+        <p:txBody>
+          <a:bodyPr wrap="square" anchor="t" lIns="45720" rIns="45720" tIns="27432" bIns="27432">
+            <a:normAutofit/>
+          </a:bodyPr>
+          <a:lstStyle/>
+          <a:p>
+            <a:pPr algn="l"/>
+            <a:r>
+              <a:rPr sz="1100" b="1">
+                <a:solidFill>
+                  <a:srgbClr val="157355"/>
+                </a:solidFill>
+                <a:latin typeface="Bricolage Grotesque"/>
+              </a:rPr>
+              <a:t>un sombrero</a:t>
+            </a:r>
+          </a:p>
+          <a:p>
+            <a:pPr algn="l"/>
+            <a:r>
+              <a:rPr sz="1000">
+                <a:solidFill>
+                  <a:srgbClr val="20242E"/>
+                </a:solidFill>
+                <a:latin typeface="Inter"/>
+              </a:rPr>
+              <a:t>pide 250 pesos</a:t>
+            </a:r>
+          </a:p>
+        </p:txBody>
+      </p:sp>
+      <p:sp>
+        <p:nvSpPr>
+          <p:cNvPr id="13" name="Onthul 0"/>
+          <p:cNvSpPr/>
+          <p:nvPr/>
+        </p:nvSpPr>
+        <p:spPr>
+          <a:xfrm>
+            <a:off x="548640" y="3547872"/>
+            <a:ext cx="2526030" cy="237744"/>
+          </a:xfrm>
+          <a:prstGeom prst="roundRect">
+            <a:avLst>
+              <a:gd name="adj" fmla="val 20000"/>
+            </a:avLst>
+          </a:prstGeom>
+          <a:solidFill>
+            <a:srgbClr val="E4F4EE"/>
+          </a:solidFill>
+          <a:ln>
+            <a:noFill/>
+          </a:ln>
+          <a:effectLst/>
+        </p:spPr>
+        <p:style>
+          <a:lnRef idx="1">
+            <a:schemeClr val="accent1"/>
+          </a:lnRef>
+          <a:fillRef idx="3">
+            <a:schemeClr val="accent1"/>
+          </a:fillRef>
+          <a:effectRef idx="2">
+            <a:schemeClr val="accent1"/>
+          </a:effectRef>
+          <a:fontRef idx="minor">
+            <a:schemeClr val="lt1"/>
+          </a:fontRef>
+        </p:style>
+        <p:txBody>
+          <a:bodyPr rtlCol="0" anchor="ctr"/>
+          <a:lstStyle/>
+          <a:p/>
+        </p:txBody>
+      </p:sp>
+      <p:sp>
+        <p:nvSpPr>
+          <p:cNvPr id="14" name="OnthulTxt 0"/>
+          <p:cNvSpPr txBox="1"/>
+          <p:nvPr/>
+        </p:nvSpPr>
+        <p:spPr>
+          <a:xfrm>
+            <a:off x="566928" y="3547872"/>
+            <a:ext cx="2489454" cy="237744"/>
+          </a:xfrm>
+          <a:prstGeom prst="rect">
+            <a:avLst/>
+          </a:prstGeom>
+          <a:noFill/>
+        </p:spPr>
+        <p:txBody>
+          <a:bodyPr wrap="square" anchor="ctr" lIns="45720" rIns="45720" tIns="27432" bIns="27432">
+            <a:normAutofit/>
+          </a:bodyPr>
+          <a:lstStyle/>
+          <a:p>
+            <a:pPr algn="l"/>
+            <a:r>
+              <a:rPr sz="850" b="1">
+                <a:solidFill>
+                  <a:srgbClr val="157355"/>
+                </a:solidFill>
+                <a:latin typeface="Inter"/>
+              </a:rPr>
+              <a:t>solo al final: ≈ 120 pesos</a:t>
+            </a:r>
+          </a:p>
+        </p:txBody>
+      </p:sp>
+      <p:sp>
+        <p:nvSpPr>
+          <p:cNvPr id="15" name="Tarjeta 1"/>
+          <p:cNvSpPr/>
+          <p:nvPr/>
+        </p:nvSpPr>
+        <p:spPr>
+          <a:xfrm>
+            <a:off x="3312414" y="2670048"/>
+            <a:ext cx="2708910" cy="1170432"/>
+          </a:xfrm>
+          <a:prstGeom prst="roundRect">
+            <a:avLst>
+              <a:gd name="adj" fmla="val 6000"/>
+            </a:avLst>
+          </a:prstGeom>
+          <a:solidFill>
+            <a:srgbClr val="FFFFFF"/>
+          </a:solidFill>
+          <a:ln w="12700">
+            <a:solidFill>
+              <a:srgbClr val="E4E3DE"/>
+            </a:solidFill>
+          </a:ln>
+          <a:effectLst/>
+        </p:spPr>
+        <p:style>
+          <a:lnRef idx="1">
+            <a:schemeClr val="accent1"/>
+          </a:lnRef>
+          <a:fillRef idx="3">
+            <a:schemeClr val="accent1"/>
+          </a:fillRef>
+          <a:effectRef idx="2">
+            <a:schemeClr val="accent1"/>
+          </a:effectRef>
+          <a:fontRef idx="minor">
+            <a:schemeClr val="lt1"/>
+          </a:fontRef>
+        </p:style>
+        <p:txBody>
+          <a:bodyPr rtlCol="0" anchor="ctr"/>
+          <a:lstStyle/>
+          <a:p/>
+        </p:txBody>
+      </p:sp>
+      <p:sp>
+        <p:nvSpPr>
+          <p:cNvPr id="16" name="TarjetaTxt 1"/>
+          <p:cNvSpPr txBox="1"/>
+          <p:nvPr/>
+        </p:nvSpPr>
+        <p:spPr>
+          <a:xfrm>
+            <a:off x="3403854" y="2724912"/>
+            <a:ext cx="2526030" cy="859536"/>
+          </a:xfrm>
+          <a:prstGeom prst="rect">
+            <a:avLst/>
+          </a:prstGeom>
+          <a:noFill/>
+        </p:spPr>
+        <p:txBody>
+          <a:bodyPr wrap="square" anchor="t" lIns="45720" rIns="45720" tIns="27432" bIns="27432">
+            <a:normAutofit/>
+          </a:bodyPr>
+          <a:lstStyle/>
+          <a:p>
+            <a:pPr algn="l"/>
+            <a:r>
+              <a:rPr sz="1100" b="1">
+                <a:solidFill>
+                  <a:srgbClr val="157355"/>
+                </a:solidFill>
+                <a:latin typeface="Bricolage Grotesque"/>
+              </a:rPr>
+              <a:t>una manta de lana</a:t>
+            </a:r>
+          </a:p>
+          <a:p>
+            <a:pPr algn="l"/>
+            <a:r>
+              <a:rPr sz="1000">
+                <a:solidFill>
+                  <a:srgbClr val="20242E"/>
+                </a:solidFill>
+                <a:latin typeface="Inter"/>
+              </a:rPr>
+              <a:t>pide 600 pesos</a:t>
+            </a:r>
+          </a:p>
+        </p:txBody>
+      </p:sp>
+      <p:sp>
+        <p:nvSpPr>
+          <p:cNvPr id="17" name="Onthul 1"/>
+          <p:cNvSpPr/>
+          <p:nvPr/>
+        </p:nvSpPr>
+        <p:spPr>
+          <a:xfrm>
+            <a:off x="3403854" y="3547872"/>
+            <a:ext cx="2526030" cy="237744"/>
+          </a:xfrm>
+          <a:prstGeom prst="roundRect">
+            <a:avLst>
+              <a:gd name="adj" fmla="val 20000"/>
+            </a:avLst>
+          </a:prstGeom>
+          <a:solidFill>
+            <a:srgbClr val="E4F4EE"/>
+          </a:solidFill>
+          <a:ln>
+            <a:noFill/>
+          </a:ln>
+          <a:effectLst/>
+        </p:spPr>
+        <p:style>
+          <a:lnRef idx="1">
+            <a:schemeClr val="accent1"/>
+          </a:lnRef>
+          <a:fillRef idx="3">
+            <a:schemeClr val="accent1"/>
+          </a:fillRef>
+          <a:effectRef idx="2">
+            <a:schemeClr val="accent1"/>
+          </a:effectRef>
+          <a:fontRef idx="minor">
+            <a:schemeClr val="lt1"/>
+          </a:fontRef>
+        </p:style>
+        <p:txBody>
+          <a:bodyPr rtlCol="0" anchor="ctr"/>
+          <a:lstStyle/>
+          <a:p/>
+        </p:txBody>
+      </p:sp>
+      <p:sp>
+        <p:nvSpPr>
+          <p:cNvPr id="18" name="OnthulTxt 1"/>
+          <p:cNvSpPr txBox="1"/>
+          <p:nvPr/>
+        </p:nvSpPr>
+        <p:spPr>
+          <a:xfrm>
+            <a:off x="3422142" y="3547872"/>
+            <a:ext cx="2489454" cy="237744"/>
+          </a:xfrm>
+          <a:prstGeom prst="rect">
+            <a:avLst/>
+          </a:prstGeom>
+          <a:noFill/>
+        </p:spPr>
+        <p:txBody>
+          <a:bodyPr wrap="square" anchor="ctr" lIns="45720" rIns="45720" tIns="27432" bIns="27432">
+            <a:normAutofit/>
+          </a:bodyPr>
+          <a:lstStyle/>
+          <a:p>
+            <a:pPr algn="l"/>
+            <a:r>
+              <a:rPr sz="850" b="1">
+                <a:solidFill>
+                  <a:srgbClr val="157355"/>
+                </a:solidFill>
+                <a:latin typeface="Inter"/>
+              </a:rPr>
+              <a:t>solo al final: ≈ 350 pesos</a:t>
+            </a:r>
+          </a:p>
+        </p:txBody>
+      </p:sp>
+      <p:sp>
+        <p:nvSpPr>
+          <p:cNvPr id="19" name="Tarjeta 2"/>
+          <p:cNvSpPr/>
+          <p:nvPr/>
+        </p:nvSpPr>
+        <p:spPr>
+          <a:xfrm>
+            <a:off x="6167628" y="2670048"/>
+            <a:ext cx="2708910" cy="1170432"/>
+          </a:xfrm>
+          <a:prstGeom prst="roundRect">
+            <a:avLst>
+              <a:gd name="adj" fmla="val 6000"/>
+            </a:avLst>
+          </a:prstGeom>
+          <a:solidFill>
+            <a:srgbClr val="FFFFFF"/>
+          </a:solidFill>
+          <a:ln w="12700">
+            <a:solidFill>
+              <a:srgbClr val="E4E3DE"/>
+            </a:solidFill>
+          </a:ln>
+          <a:effectLst/>
+        </p:spPr>
+        <p:style>
+          <a:lnRef idx="1">
+            <a:schemeClr val="accent1"/>
+          </a:lnRef>
+          <a:fillRef idx="3">
+            <a:schemeClr val="accent1"/>
+          </a:fillRef>
+          <a:effectRef idx="2">
+            <a:schemeClr val="accent1"/>
+          </a:effectRef>
+          <a:fontRef idx="minor">
+            <a:schemeClr val="lt1"/>
+          </a:fontRef>
+        </p:style>
+        <p:txBody>
+          <a:bodyPr rtlCol="0" anchor="ctr"/>
+          <a:lstStyle/>
+          <a:p/>
+        </p:txBody>
+      </p:sp>
+      <p:sp>
+        <p:nvSpPr>
+          <p:cNvPr id="20" name="TarjetaTxt 2"/>
+          <p:cNvSpPr txBox="1"/>
+          <p:nvPr/>
+        </p:nvSpPr>
+        <p:spPr>
+          <a:xfrm>
+            <a:off x="6259068" y="2724912"/>
+            <a:ext cx="2526030" cy="859536"/>
+          </a:xfrm>
+          <a:prstGeom prst="rect">
+            <a:avLst/>
+          </a:prstGeom>
+          <a:noFill/>
+        </p:spPr>
+        <p:txBody>
+          <a:bodyPr wrap="square" anchor="t" lIns="45720" rIns="45720" tIns="27432" bIns="27432">
+            <a:normAutofit/>
+          </a:bodyPr>
+          <a:lstStyle/>
+          <a:p>
+            <a:pPr algn="l"/>
+            <a:r>
+              <a:rPr sz="1100" b="1">
+                <a:solidFill>
+                  <a:srgbClr val="157355"/>
+                </a:solidFill>
+                <a:latin typeface="Bricolage Grotesque"/>
+              </a:rPr>
+              <a:t>unos aretes de plata</a:t>
+            </a:r>
+          </a:p>
+          <a:p>
+            <a:pPr algn="l"/>
+            <a:r>
+              <a:rPr sz="1000">
+                <a:solidFill>
+                  <a:srgbClr val="20242E"/>
+                </a:solidFill>
+                <a:latin typeface="Inter"/>
+              </a:rPr>
+              <a:t>pide 400 pesos</a:t>
+            </a:r>
+          </a:p>
+        </p:txBody>
+      </p:sp>
+      <p:sp>
+        <p:nvSpPr>
+          <p:cNvPr id="21" name="Onthul 2"/>
+          <p:cNvSpPr/>
+          <p:nvPr/>
+        </p:nvSpPr>
+        <p:spPr>
+          <a:xfrm>
+            <a:off x="6259068" y="3547872"/>
+            <a:ext cx="2526030" cy="237744"/>
+          </a:xfrm>
+          <a:prstGeom prst="roundRect">
+            <a:avLst>
+              <a:gd name="adj" fmla="val 20000"/>
+            </a:avLst>
+          </a:prstGeom>
+          <a:solidFill>
+            <a:srgbClr val="E4F4EE"/>
+          </a:solidFill>
+          <a:ln>
+            <a:noFill/>
+          </a:ln>
+          <a:effectLst/>
+        </p:spPr>
+        <p:style>
+          <a:lnRef idx="1">
+            <a:schemeClr val="accent1"/>
+          </a:lnRef>
+          <a:fillRef idx="3">
+            <a:schemeClr val="accent1"/>
+          </a:fillRef>
+          <a:effectRef idx="2">
+            <a:schemeClr val="accent1"/>
+          </a:effectRef>
+          <a:fontRef idx="minor">
+            <a:schemeClr val="lt1"/>
+          </a:fontRef>
+        </p:style>
+        <p:txBody>
+          <a:bodyPr rtlCol="0" anchor="ctr"/>
+          <a:lstStyle/>
+          <a:p/>
+        </p:txBody>
+      </p:sp>
+      <p:sp>
+        <p:nvSpPr>
+          <p:cNvPr id="22" name="OnthulTxt 2"/>
+          <p:cNvSpPr txBox="1"/>
+          <p:nvPr/>
+        </p:nvSpPr>
+        <p:spPr>
+          <a:xfrm>
+            <a:off x="6277356" y="3547872"/>
+            <a:ext cx="2489454" cy="237744"/>
+          </a:xfrm>
+          <a:prstGeom prst="rect">
+            <a:avLst/>
+          </a:prstGeom>
+          <a:noFill/>
+        </p:spPr>
+        <p:txBody>
+          <a:bodyPr wrap="square" anchor="ctr" lIns="45720" rIns="45720" tIns="27432" bIns="27432">
+            <a:normAutofit/>
+          </a:bodyPr>
+          <a:lstStyle/>
+          <a:p>
+            <a:pPr algn="l"/>
+            <a:r>
+              <a:rPr sz="850" b="1">
+                <a:solidFill>
+                  <a:srgbClr val="157355"/>
+                </a:solidFill>
+                <a:latin typeface="Inter"/>
+              </a:rPr>
+              <a:t>solo al final: ≈ 200 pesos</a:t>
+            </a:r>
+          </a:p>
+        </p:txBody>
+      </p:sp>
+      <p:sp>
+        <p:nvSpPr>
+          <p:cNvPr id="23" name="Tarjeta 3"/>
+          <p:cNvSpPr/>
+          <p:nvPr/>
+        </p:nvSpPr>
+        <p:spPr>
+          <a:xfrm>
+            <a:off x="9022842" y="2670048"/>
+            <a:ext cx="2708910" cy="1170432"/>
+          </a:xfrm>
+          <a:prstGeom prst="roundRect">
+            <a:avLst>
+              <a:gd name="adj" fmla="val 6000"/>
+            </a:avLst>
+          </a:prstGeom>
+          <a:solidFill>
+            <a:srgbClr val="FFFFFF"/>
+          </a:solidFill>
+          <a:ln w="12700">
+            <a:solidFill>
+              <a:srgbClr val="E4E3DE"/>
+            </a:solidFill>
+          </a:ln>
+          <a:effectLst/>
+        </p:spPr>
+        <p:style>
+          <a:lnRef idx="1">
+            <a:schemeClr val="accent1"/>
+          </a:lnRef>
+          <a:fillRef idx="3">
+            <a:schemeClr val="accent1"/>
+          </a:fillRef>
+          <a:effectRef idx="2">
+            <a:schemeClr val="accent1"/>
+          </a:effectRef>
+          <a:fontRef idx="minor">
+            <a:schemeClr val="lt1"/>
+          </a:fontRef>
+        </p:style>
+        <p:txBody>
+          <a:bodyPr rtlCol="0" anchor="ctr"/>
+          <a:lstStyle/>
+          <a:p/>
+        </p:txBody>
+      </p:sp>
+      <p:sp>
+        <p:nvSpPr>
+          <p:cNvPr id="24" name="TarjetaTxt 3"/>
+          <p:cNvSpPr txBox="1"/>
+          <p:nvPr/>
+        </p:nvSpPr>
+        <p:spPr>
+          <a:xfrm>
+            <a:off x="9114282" y="2724912"/>
+            <a:ext cx="2526030" cy="859536"/>
+          </a:xfrm>
+          <a:prstGeom prst="rect">
+            <a:avLst/>
+          </a:prstGeom>
+          <a:noFill/>
+        </p:spPr>
+        <p:txBody>
+          <a:bodyPr wrap="square" anchor="t" lIns="45720" rIns="45720" tIns="27432" bIns="27432">
+            <a:normAutofit/>
+          </a:bodyPr>
+          <a:lstStyle/>
+          <a:p>
+            <a:pPr algn="l"/>
+            <a:r>
+              <a:rPr sz="1100" b="1">
+                <a:solidFill>
+                  <a:srgbClr val="157355"/>
+                </a:solidFill>
+                <a:latin typeface="Bricolage Grotesque"/>
+              </a:rPr>
+              <a:t>una bolsa bordada</a:t>
+            </a:r>
+          </a:p>
+          <a:p>
+            <a:pPr algn="l"/>
+            <a:r>
+              <a:rPr sz="1000">
+                <a:solidFill>
+                  <a:srgbClr val="20242E"/>
+                </a:solidFill>
+                <a:latin typeface="Inter"/>
+              </a:rPr>
+              <a:t>pide 500 pesos</a:t>
+            </a:r>
+          </a:p>
+        </p:txBody>
+      </p:sp>
+      <p:sp>
+        <p:nvSpPr>
+          <p:cNvPr id="25" name="Onthul 3"/>
+          <p:cNvSpPr/>
+          <p:nvPr/>
+        </p:nvSpPr>
+        <p:spPr>
+          <a:xfrm>
+            <a:off x="9114282" y="3547872"/>
+            <a:ext cx="2526030" cy="237744"/>
+          </a:xfrm>
+          <a:prstGeom prst="roundRect">
+            <a:avLst>
+              <a:gd name="adj" fmla="val 20000"/>
+            </a:avLst>
+          </a:prstGeom>
+          <a:solidFill>
+            <a:srgbClr val="E4F4EE"/>
+          </a:solidFill>
+          <a:ln>
+            <a:noFill/>
+          </a:ln>
+          <a:effectLst/>
+        </p:spPr>
+        <p:style>
+          <a:lnRef idx="1">
+            <a:schemeClr val="accent1"/>
+          </a:lnRef>
+          <a:fillRef idx="3">
+            <a:schemeClr val="accent1"/>
+          </a:fillRef>
+          <a:effectRef idx="2">
+            <a:schemeClr val="accent1"/>
+          </a:effectRef>
+          <a:fontRef idx="minor">
+            <a:schemeClr val="lt1"/>
+          </a:fontRef>
+        </p:style>
+        <p:txBody>
+          <a:bodyPr rtlCol="0" anchor="ctr"/>
+          <a:lstStyle/>
+          <a:p/>
+        </p:txBody>
+      </p:sp>
+      <p:sp>
+        <p:nvSpPr>
+          <p:cNvPr id="26" name="OnthulTxt 3"/>
+          <p:cNvSpPr txBox="1"/>
+          <p:nvPr/>
+        </p:nvSpPr>
+        <p:spPr>
+          <a:xfrm>
+            <a:off x="9132570" y="3547872"/>
+            <a:ext cx="2489454" cy="237744"/>
+          </a:xfrm>
+          <a:prstGeom prst="rect">
+            <a:avLst/>
+          </a:prstGeom>
+          <a:noFill/>
+        </p:spPr>
+        <p:txBody>
+          <a:bodyPr wrap="square" anchor="ctr" lIns="45720" rIns="45720" tIns="27432" bIns="27432">
+            <a:normAutofit/>
+          </a:bodyPr>
+          <a:lstStyle/>
+          <a:p>
+            <a:pPr algn="l"/>
+            <a:r>
+              <a:rPr sz="850" b="1">
+                <a:solidFill>
+                  <a:srgbClr val="157355"/>
+                </a:solidFill>
+                <a:latin typeface="Inter"/>
+              </a:rPr>
+              <a:t>solo al final: ≈ 260 pesos</a:t>
+            </a:r>
+          </a:p>
+        </p:txBody>
+      </p:sp>
+      <p:sp>
+        <p:nvSpPr>
+          <p:cNvPr id="27" name="Tarjeta 4"/>
+          <p:cNvSpPr/>
+          <p:nvPr/>
+        </p:nvSpPr>
+        <p:spPr>
+          <a:xfrm>
+            <a:off x="457200" y="3968496"/>
+            <a:ext cx="2708910" cy="1170432"/>
+          </a:xfrm>
+          <a:prstGeom prst="roundRect">
+            <a:avLst>
+              <a:gd name="adj" fmla="val 6000"/>
+            </a:avLst>
+          </a:prstGeom>
+          <a:solidFill>
+            <a:srgbClr val="FFFFFF"/>
+          </a:solidFill>
+          <a:ln w="12700">
+            <a:solidFill>
+              <a:srgbClr val="E4E3DE"/>
+            </a:solidFill>
+          </a:ln>
+          <a:effectLst/>
+        </p:spPr>
+        <p:style>
+          <a:lnRef idx="1">
+            <a:schemeClr val="accent1"/>
+          </a:lnRef>
+          <a:fillRef idx="3">
+            <a:schemeClr val="accent1"/>
+          </a:fillRef>
+          <a:effectRef idx="2">
+            <a:schemeClr val="accent1"/>
+          </a:effectRef>
+          <a:fontRef idx="minor">
+            <a:schemeClr val="lt1"/>
+          </a:fontRef>
+        </p:style>
+        <p:txBody>
+          <a:bodyPr rtlCol="0" anchor="ctr"/>
+          <a:lstStyle/>
+          <a:p/>
+        </p:txBody>
+      </p:sp>
+      <p:sp>
+        <p:nvSpPr>
+          <p:cNvPr id="28" name="TarjetaTxt 4"/>
+          <p:cNvSpPr txBox="1"/>
+          <p:nvPr/>
+        </p:nvSpPr>
+        <p:spPr>
+          <a:xfrm>
+            <a:off x="548640" y="4023360"/>
+            <a:ext cx="2526030" cy="1060704"/>
+          </a:xfrm>
+          <a:prstGeom prst="rect">
+            <a:avLst/>
+          </a:prstGeom>
+          <a:noFill/>
+        </p:spPr>
+        <p:txBody>
+          <a:bodyPr wrap="square" anchor="t" lIns="45720" rIns="45720" tIns="27432" bIns="27432">
+            <a:normAutofit/>
+          </a:bodyPr>
+          <a:lstStyle/>
+          <a:p>
+            <a:pPr algn="l"/>
+            <a:r>
+              <a:rPr sz="1100" b="1">
+                <a:solidFill>
+                  <a:srgbClr val="157355"/>
+                </a:solidFill>
+                <a:latin typeface="Bricolage Grotesque"/>
+              </a:rPr>
+              <a:t>Vendedor/a</a:t>
+            </a:r>
+          </a:p>
+          <a:p>
+            <a:pPr algn="l"/>
+            <a:r>
+              <a:rPr sz="1000">
+                <a:solidFill>
+                  <a:srgbClr val="20242E"/>
+                </a:solidFill>
+                <a:latin typeface="Inter"/>
+              </a:rPr>
+              <a:t>Le hago un buen precio.</a:t>
+            </a:r>
+          </a:p>
+        </p:txBody>
+      </p:sp>
+      <p:sp>
+        <p:nvSpPr>
+          <p:cNvPr id="29" name="Tarjeta 5"/>
+          <p:cNvSpPr/>
+          <p:nvPr/>
+        </p:nvSpPr>
+        <p:spPr>
+          <a:xfrm>
+            <a:off x="3312414" y="3968496"/>
+            <a:ext cx="2708910" cy="1170432"/>
+          </a:xfrm>
+          <a:prstGeom prst="roundRect">
+            <a:avLst>
+              <a:gd name="adj" fmla="val 6000"/>
+            </a:avLst>
+          </a:prstGeom>
+          <a:solidFill>
+            <a:srgbClr val="FFFFFF"/>
+          </a:solidFill>
+          <a:ln w="12700">
+            <a:solidFill>
+              <a:srgbClr val="E4E3DE"/>
+            </a:solidFill>
+          </a:ln>
+          <a:effectLst/>
+        </p:spPr>
+        <p:style>
+          <a:lnRef idx="1">
+            <a:schemeClr val="accent1"/>
+          </a:lnRef>
+          <a:fillRef idx="3">
+            <a:schemeClr val="accent1"/>
+          </a:fillRef>
+          <a:effectRef idx="2">
+            <a:schemeClr val="accent1"/>
+          </a:effectRef>
+          <a:fontRef idx="minor">
+            <a:schemeClr val="lt1"/>
+          </a:fontRef>
+        </p:style>
+        <p:txBody>
+          <a:bodyPr rtlCol="0" anchor="ctr"/>
+          <a:lstStyle/>
+          <a:p/>
+        </p:txBody>
+      </p:sp>
+      <p:sp>
+        <p:nvSpPr>
+          <p:cNvPr id="30" name="TarjetaTxt 5"/>
+          <p:cNvSpPr txBox="1"/>
+          <p:nvPr/>
+        </p:nvSpPr>
+        <p:spPr>
+          <a:xfrm>
+            <a:off x="3403854" y="4023360"/>
+            <a:ext cx="2526030" cy="1060704"/>
+          </a:xfrm>
+          <a:prstGeom prst="rect">
+            <a:avLst/>
+          </a:prstGeom>
+          <a:noFill/>
+        </p:spPr>
+        <p:txBody>
+          <a:bodyPr wrap="square" anchor="t" lIns="45720" rIns="45720" tIns="27432" bIns="27432">
+            <a:normAutofit/>
+          </a:bodyPr>
+          <a:lstStyle/>
+          <a:p>
+            <a:pPr algn="l"/>
+            <a:r>
+              <a:rPr sz="1100" b="1">
+                <a:solidFill>
+                  <a:srgbClr val="157355"/>
+                </a:solidFill>
+                <a:latin typeface="Bricolage Grotesque"/>
+              </a:rPr>
+              <a:t>Vendedor/a</a:t>
+            </a:r>
+          </a:p>
+          <a:p>
+            <a:pPr algn="l"/>
+            <a:r>
+              <a:rPr sz="1000">
+                <a:solidFill>
+                  <a:srgbClr val="20242E"/>
+                </a:solidFill>
+                <a:latin typeface="Inter"/>
+              </a:rPr>
+              <a:t>Es hecho a mano, mire.</a:t>
+            </a:r>
+          </a:p>
+        </p:txBody>
+      </p:sp>
+      <p:sp>
+        <p:nvSpPr>
+          <p:cNvPr id="31" name="Tarjeta 6"/>
+          <p:cNvSpPr/>
+          <p:nvPr/>
+        </p:nvSpPr>
+        <p:spPr>
+          <a:xfrm>
+            <a:off x="6167628" y="3968496"/>
+            <a:ext cx="2708910" cy="1170432"/>
+          </a:xfrm>
+          <a:prstGeom prst="roundRect">
+            <a:avLst>
+              <a:gd name="adj" fmla="val 6000"/>
+            </a:avLst>
+          </a:prstGeom>
+          <a:solidFill>
+            <a:srgbClr val="FFFFFF"/>
+          </a:solidFill>
+          <a:ln w="12700">
+            <a:solidFill>
+              <a:srgbClr val="E4E3DE"/>
+            </a:solidFill>
+          </a:ln>
+          <a:effectLst/>
+        </p:spPr>
+        <p:style>
+          <a:lnRef idx="1">
+            <a:schemeClr val="accent1"/>
+          </a:lnRef>
+          <a:fillRef idx="3">
+            <a:schemeClr val="accent1"/>
+          </a:fillRef>
+          <a:effectRef idx="2">
+            <a:schemeClr val="accent1"/>
+          </a:effectRef>
+          <a:fontRef idx="minor">
+            <a:schemeClr val="lt1"/>
+          </a:fontRef>
+        </p:style>
+        <p:txBody>
+          <a:bodyPr rtlCol="0" anchor="ctr"/>
+          <a:lstStyle/>
+          <a:p/>
+        </p:txBody>
+      </p:sp>
+      <p:sp>
+        <p:nvSpPr>
+          <p:cNvPr id="32" name="TarjetaTxt 6"/>
+          <p:cNvSpPr txBox="1"/>
+          <p:nvPr/>
+        </p:nvSpPr>
+        <p:spPr>
+          <a:xfrm>
+            <a:off x="6259068" y="4023360"/>
+            <a:ext cx="2526030" cy="1060704"/>
+          </a:xfrm>
+          <a:prstGeom prst="rect">
+            <a:avLst/>
+          </a:prstGeom>
+          <a:noFill/>
+        </p:spPr>
+        <p:txBody>
+          <a:bodyPr wrap="square" anchor="t" lIns="45720" rIns="45720" tIns="27432" bIns="27432">
+            <a:normAutofit/>
+          </a:bodyPr>
+          <a:lstStyle/>
+          <a:p>
+            <a:pPr algn="l"/>
+            <a:r>
+              <a:rPr sz="1100" b="1">
+                <a:solidFill>
+                  <a:srgbClr val="157355"/>
+                </a:solidFill>
+                <a:latin typeface="Bricolage Grotesque"/>
+              </a:rPr>
+              <a:t>Vendedor/a</a:t>
+            </a:r>
+          </a:p>
+          <a:p>
+            <a:pPr algn="l"/>
+            <a:r>
+              <a:rPr sz="1000">
+                <a:solidFill>
+                  <a:srgbClr val="20242E"/>
+                </a:solidFill>
+                <a:latin typeface="Inter"/>
+              </a:rPr>
+              <a:t>Se lo dejo en …</a:t>
+            </a:r>
+          </a:p>
+        </p:txBody>
+      </p:sp>
+      <p:sp>
+        <p:nvSpPr>
+          <p:cNvPr id="33" name="Tarjeta 7"/>
+          <p:cNvSpPr/>
+          <p:nvPr/>
+        </p:nvSpPr>
+        <p:spPr>
+          <a:xfrm>
+            <a:off x="9022842" y="3968496"/>
+            <a:ext cx="2708910" cy="1170432"/>
+          </a:xfrm>
+          <a:prstGeom prst="roundRect">
+            <a:avLst>
+              <a:gd name="adj" fmla="val 6000"/>
+            </a:avLst>
+          </a:prstGeom>
+          <a:solidFill>
+            <a:srgbClr val="FFFFFF"/>
+          </a:solidFill>
+          <a:ln w="12700">
+            <a:solidFill>
+              <a:srgbClr val="E4E3DE"/>
+            </a:solidFill>
+          </a:ln>
+          <a:effectLst/>
+        </p:spPr>
+        <p:style>
+          <a:lnRef idx="1">
+            <a:schemeClr val="accent1"/>
+          </a:lnRef>
+          <a:fillRef idx="3">
+            <a:schemeClr val="accent1"/>
+          </a:fillRef>
+          <a:effectRef idx="2">
+            <a:schemeClr val="accent1"/>
+          </a:effectRef>
+          <a:fontRef idx="minor">
+            <a:schemeClr val="lt1"/>
+          </a:fontRef>
+        </p:style>
+        <p:txBody>
+          <a:bodyPr rtlCol="0" anchor="ctr"/>
+          <a:lstStyle/>
+          <a:p/>
+        </p:txBody>
+      </p:sp>
+      <p:sp>
+        <p:nvSpPr>
+          <p:cNvPr id="34" name="TarjetaTxt 7"/>
+          <p:cNvSpPr txBox="1"/>
+          <p:nvPr/>
+        </p:nvSpPr>
+        <p:spPr>
+          <a:xfrm>
+            <a:off x="9114282" y="4023360"/>
+            <a:ext cx="2526030" cy="1060704"/>
+          </a:xfrm>
+          <a:prstGeom prst="rect">
+            <a:avLst/>
+          </a:prstGeom>
+          <a:noFill/>
+        </p:spPr>
+        <p:txBody>
+          <a:bodyPr wrap="square" anchor="t" lIns="45720" rIns="45720" tIns="27432" bIns="27432">
+            <a:normAutofit/>
+          </a:bodyPr>
+          <a:lstStyle/>
+          <a:p>
+            <a:pPr algn="l"/>
+            <a:r>
+              <a:rPr sz="1100" b="1">
+                <a:solidFill>
+                  <a:srgbClr val="157355"/>
+                </a:solidFill>
+                <a:latin typeface="Bricolage Grotesque"/>
+              </a:rPr>
+              <a:t>Vendedor/a</a:t>
+            </a:r>
+          </a:p>
+          <a:p>
+            <a:pPr algn="l"/>
+            <a:r>
+              <a:rPr sz="1000">
+                <a:solidFill>
+                  <a:srgbClr val="20242E"/>
+                </a:solidFill>
+                <a:latin typeface="Inter"/>
+              </a:rPr>
+              <a:t>No puedo bajar más.</a:t>
+            </a:r>
+          </a:p>
+        </p:txBody>
+      </p:sp>
+      <p:sp>
+        <p:nvSpPr>
+          <p:cNvPr id="35" name="Tarjeta 8"/>
+          <p:cNvSpPr/>
+          <p:nvPr/>
+        </p:nvSpPr>
+        <p:spPr>
+          <a:xfrm>
+            <a:off x="457200" y="5266944"/>
+            <a:ext cx="2708910" cy="1170432"/>
+          </a:xfrm>
+          <a:prstGeom prst="roundRect">
+            <a:avLst>
+              <a:gd name="adj" fmla="val 6000"/>
+            </a:avLst>
+          </a:prstGeom>
+          <a:solidFill>
+            <a:srgbClr val="FFFFFF"/>
+          </a:solidFill>
+          <a:ln w="12700">
+            <a:solidFill>
+              <a:srgbClr val="E4E3DE"/>
+            </a:solidFill>
+          </a:ln>
+          <a:effectLst/>
+        </p:spPr>
+        <p:style>
+          <a:lnRef idx="1">
+            <a:schemeClr val="accent1"/>
+          </a:lnRef>
+          <a:fillRef idx="3">
+            <a:schemeClr val="accent1"/>
+          </a:fillRef>
+          <a:effectRef idx="2">
+            <a:schemeClr val="accent1"/>
+          </a:effectRef>
+          <a:fontRef idx="minor">
+            <a:schemeClr val="lt1"/>
+          </a:fontRef>
+        </p:style>
+        <p:txBody>
+          <a:bodyPr rtlCol="0" anchor="ctr"/>
+          <a:lstStyle/>
+          <a:p/>
+        </p:txBody>
+      </p:sp>
+      <p:sp>
+        <p:nvSpPr>
+          <p:cNvPr id="36" name="TarjetaTxt 8"/>
+          <p:cNvSpPr txBox="1"/>
+          <p:nvPr/>
+        </p:nvSpPr>
+        <p:spPr>
+          <a:xfrm>
+            <a:off x="548640" y="5321808"/>
+            <a:ext cx="2526030" cy="1060704"/>
+          </a:xfrm>
+          <a:prstGeom prst="rect">
+            <a:avLst/>
+          </a:prstGeom>
+          <a:noFill/>
+        </p:spPr>
+        <p:txBody>
+          <a:bodyPr wrap="square" anchor="t" lIns="45720" rIns="45720" tIns="27432" bIns="27432">
+            <a:normAutofit/>
+          </a:bodyPr>
+          <a:lstStyle/>
+          <a:p>
+            <a:pPr algn="l"/>
+            <a:r>
+              <a:rPr sz="1100" b="1">
+                <a:solidFill>
+                  <a:srgbClr val="157355"/>
+                </a:solidFill>
+                <a:latin typeface="Bricolage Grotesque"/>
+              </a:rPr>
+              <a:t>Cliente</a:t>
+            </a:r>
+          </a:p>
+          <a:p>
+            <a:pPr algn="l"/>
+            <a:r>
+              <a:rPr sz="1000">
+                <a:solidFill>
+                  <a:srgbClr val="20242E"/>
+                </a:solidFill>
+                <a:latin typeface="Inter"/>
+              </a:rPr>
+              <a:t>¿Cuánto cuesta?</a:t>
+            </a:r>
+          </a:p>
+        </p:txBody>
+      </p:sp>
+      <p:sp>
+        <p:nvSpPr>
+          <p:cNvPr id="37" name="Tarjeta 9"/>
+          <p:cNvSpPr/>
+          <p:nvPr/>
+        </p:nvSpPr>
+        <p:spPr>
+          <a:xfrm>
+            <a:off x="3312414" y="5266944"/>
+            <a:ext cx="2708910" cy="1170432"/>
+          </a:xfrm>
+          <a:prstGeom prst="roundRect">
+            <a:avLst>
+              <a:gd name="adj" fmla="val 6000"/>
+            </a:avLst>
+          </a:prstGeom>
+          <a:solidFill>
+            <a:srgbClr val="FFFFFF"/>
+          </a:solidFill>
+          <a:ln w="12700">
+            <a:solidFill>
+              <a:srgbClr val="E4E3DE"/>
+            </a:solidFill>
+          </a:ln>
+          <a:effectLst/>
+        </p:spPr>
+        <p:style>
+          <a:lnRef idx="1">
+            <a:schemeClr val="accent1"/>
+          </a:lnRef>
+          <a:fillRef idx="3">
+            <a:schemeClr val="accent1"/>
+          </a:fillRef>
+          <a:effectRef idx="2">
+            <a:schemeClr val="accent1"/>
+          </a:effectRef>
+          <a:fontRef idx="minor">
+            <a:schemeClr val="lt1"/>
+          </a:fontRef>
+        </p:style>
+        <p:txBody>
+          <a:bodyPr rtlCol="0" anchor="ctr"/>
+          <a:lstStyle/>
+          <a:p/>
+        </p:txBody>
+      </p:sp>
+      <p:sp>
+        <p:nvSpPr>
+          <p:cNvPr id="38" name="TarjetaTxt 9"/>
+          <p:cNvSpPr txBox="1"/>
+          <p:nvPr/>
+        </p:nvSpPr>
+        <p:spPr>
+          <a:xfrm>
+            <a:off x="3403854" y="5321808"/>
+            <a:ext cx="2526030" cy="1060704"/>
+          </a:xfrm>
+          <a:prstGeom prst="rect">
+            <a:avLst/>
+          </a:prstGeom>
+          <a:noFill/>
+        </p:spPr>
+        <p:txBody>
+          <a:bodyPr wrap="square" anchor="t" lIns="45720" rIns="45720" tIns="27432" bIns="27432">
+            <a:normAutofit/>
+          </a:bodyPr>
+          <a:lstStyle/>
+          <a:p>
+            <a:pPr algn="l"/>
+            <a:r>
+              <a:rPr sz="1100" b="1">
+                <a:solidFill>
+                  <a:srgbClr val="157355"/>
+                </a:solidFill>
+                <a:latin typeface="Bricolage Grotesque"/>
+              </a:rPr>
+              <a:t>Cliente</a:t>
+            </a:r>
+          </a:p>
+          <a:p>
+            <a:pPr algn="l"/>
+            <a:r>
+              <a:rPr sz="1000">
+                <a:solidFill>
+                  <a:srgbClr val="20242E"/>
+                </a:solidFill>
+                <a:latin typeface="Inter"/>
+              </a:rPr>
+              <a:t>Es un poco caro para mí.</a:t>
+            </a:r>
+          </a:p>
+        </p:txBody>
+      </p:sp>
+      <p:sp>
+        <p:nvSpPr>
+          <p:cNvPr id="39" name="Tarjeta 10"/>
+          <p:cNvSpPr/>
+          <p:nvPr/>
+        </p:nvSpPr>
+        <p:spPr>
+          <a:xfrm>
+            <a:off x="6167628" y="5266944"/>
+            <a:ext cx="2708910" cy="1170432"/>
+          </a:xfrm>
+          <a:prstGeom prst="roundRect">
+            <a:avLst>
+              <a:gd name="adj" fmla="val 6000"/>
+            </a:avLst>
+          </a:prstGeom>
+          <a:solidFill>
+            <a:srgbClr val="FFFFFF"/>
+          </a:solidFill>
+          <a:ln w="12700">
+            <a:solidFill>
+              <a:srgbClr val="E4E3DE"/>
+            </a:solidFill>
+          </a:ln>
+          <a:effectLst/>
+        </p:spPr>
+        <p:style>
+          <a:lnRef idx="1">
+            <a:schemeClr val="accent1"/>
+          </a:lnRef>
+          <a:fillRef idx="3">
+            <a:schemeClr val="accent1"/>
+          </a:fillRef>
+          <a:effectRef idx="2">
+            <a:schemeClr val="accent1"/>
+          </a:effectRef>
+          <a:fontRef idx="minor">
+            <a:schemeClr val="lt1"/>
+          </a:fontRef>
+        </p:style>
+        <p:txBody>
+          <a:bodyPr rtlCol="0" anchor="ctr"/>
+          <a:lstStyle/>
+          <a:p/>
+        </p:txBody>
+      </p:sp>
+      <p:sp>
+        <p:nvSpPr>
+          <p:cNvPr id="40" name="TarjetaTxt 10"/>
+          <p:cNvSpPr txBox="1"/>
+          <p:nvPr/>
+        </p:nvSpPr>
+        <p:spPr>
+          <a:xfrm>
+            <a:off x="6259068" y="5321808"/>
+            <a:ext cx="2526030" cy="1060704"/>
+          </a:xfrm>
+          <a:prstGeom prst="rect">
+            <a:avLst/>
+          </a:prstGeom>
+          <a:noFill/>
+        </p:spPr>
+        <p:txBody>
+          <a:bodyPr wrap="square" anchor="t" lIns="45720" rIns="45720" tIns="27432" bIns="27432">
+            <a:normAutofit/>
+          </a:bodyPr>
+          <a:lstStyle/>
+          <a:p>
+            <a:pPr algn="l"/>
+            <a:r>
+              <a:rPr sz="1100" b="1">
+                <a:solidFill>
+                  <a:srgbClr val="157355"/>
+                </a:solidFill>
+                <a:latin typeface="Bricolage Grotesque"/>
+              </a:rPr>
+              <a:t>Cliente</a:t>
+            </a:r>
+          </a:p>
+          <a:p>
+            <a:pPr algn="l"/>
+            <a:r>
+              <a:rPr sz="1000">
+                <a:solidFill>
+                  <a:srgbClr val="20242E"/>
+                </a:solidFill>
+                <a:latin typeface="Inter"/>
+              </a:rPr>
+              <a:t>¿Me lo deja en …?</a:t>
+            </a:r>
+          </a:p>
+        </p:txBody>
+      </p:sp>
+      <p:sp>
+        <p:nvSpPr>
+          <p:cNvPr id="41" name="Tarjeta 11"/>
+          <p:cNvSpPr/>
+          <p:nvPr/>
+        </p:nvSpPr>
+        <p:spPr>
+          <a:xfrm>
+            <a:off x="9022842" y="5266944"/>
+            <a:ext cx="2708910" cy="1170432"/>
+          </a:xfrm>
+          <a:prstGeom prst="roundRect">
+            <a:avLst>
+              <a:gd name="adj" fmla="val 6000"/>
+            </a:avLst>
+          </a:prstGeom>
+          <a:solidFill>
+            <a:srgbClr val="FFFFFF"/>
+          </a:solidFill>
+          <a:ln w="12700">
+            <a:solidFill>
+              <a:srgbClr val="E4E3DE"/>
+            </a:solidFill>
+          </a:ln>
+          <a:effectLst/>
+        </p:spPr>
+        <p:style>
+          <a:lnRef idx="1">
+            <a:schemeClr val="accent1"/>
+          </a:lnRef>
+          <a:fillRef idx="3">
+            <a:schemeClr val="accent1"/>
+          </a:fillRef>
+          <a:effectRef idx="2">
+            <a:schemeClr val="accent1"/>
+          </a:effectRef>
+          <a:fontRef idx="minor">
+            <a:schemeClr val="lt1"/>
+          </a:fontRef>
+        </p:style>
+        <p:txBody>
+          <a:bodyPr rtlCol="0" anchor="ctr"/>
+          <a:lstStyle/>
+          <a:p/>
+        </p:txBody>
+      </p:sp>
+      <p:sp>
+        <p:nvSpPr>
+          <p:cNvPr id="42" name="TarjetaTxt 11"/>
+          <p:cNvSpPr txBox="1"/>
+          <p:nvPr/>
+        </p:nvSpPr>
+        <p:spPr>
+          <a:xfrm>
+            <a:off x="9114282" y="5321808"/>
+            <a:ext cx="2526030" cy="1060704"/>
+          </a:xfrm>
+          <a:prstGeom prst="rect">
+            <a:avLst/>
+          </a:prstGeom>
+          <a:noFill/>
+        </p:spPr>
+        <p:txBody>
+          <a:bodyPr wrap="square" anchor="t" lIns="45720" rIns="45720" tIns="27432" bIns="27432">
+            <a:normAutofit/>
+          </a:bodyPr>
+          <a:lstStyle/>
+          <a:p>
+            <a:pPr algn="l"/>
+            <a:r>
+              <a:rPr sz="1100" b="1">
+                <a:solidFill>
+                  <a:srgbClr val="157355"/>
+                </a:solidFill>
+                <a:latin typeface="Bricolage Grotesque"/>
+              </a:rPr>
+              <a:t>Cliente</a:t>
+            </a:r>
+          </a:p>
+          <a:p>
+            <a:pPr algn="l"/>
+            <a:r>
+              <a:rPr sz="1000">
+                <a:solidFill>
+                  <a:srgbClr val="20242E"/>
+                </a:solidFill>
+                <a:latin typeface="Inter"/>
+              </a:rPr>
+              <a:t>Entonces me lo llevo.</a:t>
+            </a:r>
+          </a:p>
+        </p:txBody>
+      </p:sp>
+    </p:spTree>
+  </p:cSld>
+  <p:clrMapOvr>
+    <a:masterClrMapping/>
+  </p:clrMapOvr>
+  <p:timing>
+    <p:tnLst>
+      <p:par>
+        <p:cTn id="1" dur="indefinite" restart="never" nodeType="tmRoot">
+          <p:childTnLst>
+            <p:seq concurrent="1" nextAc="seek">
+              <p:cTn id="2" dur="indefinite" nodeType="mainSeq">
+                <p:childTnLst>
+                  <p:par>
+                    <p:cTn id="5" fill="hold">
+                      <p:stCondLst>
+                        <p:cond delay="indefinite"/>
+                      </p:stCondLst>
+                      <p:childTnLst>
+                        <p:par>
+                          <p:cTn id="6" fill="hold">
+                            <p:stCondLst>
+                              <p:cond delay="0"/>
+                            </p:stCondLst>
+                            <p:childTnLst>
+                              <p:par>
+                                <p:cTn id="7" presetID="10" presetClass="entr" presetSubtype="0" fill="hold" grpId="0" nodeType="clickEffect">
+                                  <p:stCondLst>
+                                    <p:cond delay="0"/>
+                                  </p:stCondLst>
+                                  <p:childTnLst>
+                                    <p:set>
+                                      <p:cBhvr>
+                                        <p:cTn id="8" dur="1" fill="hold">
+                                          <p:stCondLst>
+                                            <p:cond delay="0"/>
+                                          </p:stCondLst>
+                                        </p:cTn>
+                                        <p:tgtEl>
+                                          <p:spTgt spid="13"/>
+                                        </p:tgtEl>
+                                        <p:attrNameLst>
+                                          <p:attrName>style.visibility</p:attrName>
+                                        </p:attrNameLst>
+                                      </p:cBhvr>
+                                      <p:to>
+                                        <p:strVal val="visible"/>
+                                      </p:to>
+                                    </p:set>
+                                    <p:animEffect transition="in" filter="fade">
+                                      <p:cBhvr>
+                                        <p:cTn id="9" dur="500"/>
+                                        <p:tgtEl>
+                                          <p:spTgt spid="13"/>
+                                        </p:tgtEl>
+                                      </p:cBhvr>
+                                    </p:animEffect>
+                                  </p:childTnLst>
+                                </p:cTn>
+                              </p:par>
+                            </p:childTnLst>
+                          </p:cTn>
+                        </p:par>
+                      </p:childTnLst>
+                    </p:cTn>
+                  </p:par>
+                  <p:par>
+                    <p:cTn id="10" fill="hold">
+                      <p:stCondLst>
+                        <p:cond delay="indefinite"/>
+                      </p:stCondLst>
+                      <p:childTnLst>
+                        <p:par>
+                          <p:cTn id="11" fill="hold">
+                            <p:stCondLst>
+                              <p:cond delay="0"/>
+                            </p:stCondLst>
+                            <p:childTnLst>
+                              <p:par>
+                                <p:cTn id="12" presetID="10" presetClass="entr" presetSubtype="0" fill="hold" grpId="0" nodeType="clickEffect">
+                                  <p:stCondLst>
+                                    <p:cond delay="0"/>
+                                  </p:stCondLst>
+                                  <p:childTnLst>
+                                    <p:set>
+                                      <p:cBhvr>
+                                        <p:cTn id="13" dur="1" fill="hold">
+                                          <p:stCondLst>
+                                            <p:cond delay="0"/>
+                                          </p:stCondLst>
+                                        </p:cTn>
+                                        <p:tgtEl>
+                                          <p:spTgt spid="14"/>
+                                        </p:tgtEl>
+                                        <p:attrNameLst>
+                                          <p:attrName>style.visibility</p:attrName>
+                                        </p:attrNameLst>
+                                      </p:cBhvr>
+                                      <p:to>
+                                        <p:strVal val="visible"/>
+                                      </p:to>
+                                    </p:set>
+                                    <p:animEffect transition="in" filter="fade">
+                                      <p:cBhvr>
+                                        <p:cTn id="14" dur="500"/>
+                                        <p:tgtEl>
+                                          <p:spTgt spid="14"/>
+                                        </p:tgtEl>
+                                      </p:cBhvr>
+                                    </p:animEffect>
+                                  </p:childTnLst>
+                                </p:cTn>
+                              </p:par>
+                            </p:childTnLst>
+                          </p:cTn>
+                        </p:par>
+                      </p:childTnLst>
+                    </p:cTn>
+                  </p:par>
+                  <p:par>
+                    <p:cTn id="15" fill="hold">
+                      <p:stCondLst>
+                        <p:cond delay="indefinite"/>
+                      </p:stCondLst>
+                      <p:childTnLst>
+                        <p:par>
+                          <p:cTn id="16" fill="hold">
+                            <p:stCondLst>
+                              <p:cond delay="0"/>
+                            </p:stCondLst>
+                            <p:childTnLst>
+                              <p:par>
+                                <p:cTn id="17" presetID="10" presetClass="entr" presetSubtype="0" fill="hold" grpId="0" nodeType="clickEffect">
+                                  <p:stCondLst>
+                                    <p:cond delay="0"/>
+                                  </p:stCondLst>
+                                  <p:childTnLst>
+                                    <p:set>
+                                      <p:cBhvr>
+                                        <p:cTn id="18" dur="1" fill="hold">
+                                          <p:stCondLst>
+                                            <p:cond delay="0"/>
+                                          </p:stCondLst>
+                                        </p:cTn>
+                                        <p:tgtEl>
+                                          <p:spTgt spid="17"/>
+                                        </p:tgtEl>
+                                        <p:attrNameLst>
+                                          <p:attrName>style.visibility</p:attrName>
+                                        </p:attrNameLst>
+                                      </p:cBhvr>
+                                      <p:to>
+                                        <p:strVal val="visible"/>
+                                      </p:to>
+                                    </p:set>
+                                    <p:animEffect transition="in" filter="fade">
+                                      <p:cBhvr>
+                                        <p:cTn id="19" dur="500"/>
+                                        <p:tgtEl>
+                                          <p:spTgt spid="17"/>
+                                        </p:tgtEl>
+                                      </p:cBhvr>
+                                    </p:animEffect>
+                                  </p:childTnLst>
+                                </p:cTn>
+                              </p:par>
+                            </p:childTnLst>
+                          </p:cTn>
+                        </p:par>
+                      </p:childTnLst>
+                    </p:cTn>
+                  </p:par>
+                  <p:par>
+                    <p:cTn id="20" fill="hold">
+                      <p:stCondLst>
+                        <p:cond delay="indefinite"/>
+                      </p:stCondLst>
+                      <p:childTnLst>
+                        <p:par>
+                          <p:cTn id="21" fill="hold">
+                            <p:stCondLst>
+                              <p:cond delay="0"/>
+                            </p:stCondLst>
+                            <p:childTnLst>
+                              <p:par>
+                                <p:cTn id="22" presetID="10" presetClass="entr" presetSubtype="0" fill="hold" grpId="0" nodeType="clickEffect">
+                                  <p:stCondLst>
+                                    <p:cond delay="0"/>
+                                  </p:stCondLst>
+                                  <p:childTnLst>
+                                    <p:set>
+                                      <p:cBhvr>
+                                        <p:cTn id="23" dur="1" fill="hold">
+                                          <p:stCondLst>
+                                            <p:cond delay="0"/>
+                                          </p:stCondLst>
+                                        </p:cTn>
+                                        <p:tgtEl>
+                                          <p:spTgt spid="18"/>
+                                        </p:tgtEl>
+                                        <p:attrNameLst>
+                                          <p:attrName>style.visibility</p:attrName>
+                                        </p:attrNameLst>
+                                      </p:cBhvr>
+                                      <p:to>
+                                        <p:strVal val="visible"/>
+                                      </p:to>
+                                    </p:set>
+                                    <p:animEffect transition="in" filter="fade">
+                                      <p:cBhvr>
+                                        <p:cTn id="24" dur="500"/>
+                                        <p:tgtEl>
+                                          <p:spTgt spid="18"/>
+                                        </p:tgtEl>
+                                      </p:cBhvr>
+                                    </p:animEffect>
+                                  </p:childTnLst>
+                                </p:cTn>
+                              </p:par>
+                            </p:childTnLst>
+                          </p:cTn>
+                        </p:par>
+                      </p:childTnLst>
+                    </p:cTn>
+                  </p:par>
+                  <p:par>
+                    <p:cTn id="25" fill="hold">
+                      <p:stCondLst>
+                        <p:cond delay="indefinite"/>
+                      </p:stCondLst>
+                      <p:childTnLst>
+                        <p:par>
+                          <p:cTn id="26" fill="hold">
+                            <p:stCondLst>
+                              <p:cond delay="0"/>
+                            </p:stCondLst>
+                            <p:childTnLst>
+                              <p:par>
+                                <p:cTn id="27" presetID="10" presetClass="entr" presetSubtype="0" fill="hold" grpId="0" nodeType="clickEffect">
+                                  <p:stCondLst>
+                                    <p:cond delay="0"/>
+                                  </p:stCondLst>
+                                  <p:childTnLst>
+                                    <p:set>
+                                      <p:cBhvr>
+                                        <p:cTn id="28" dur="1" fill="hold">
+                                          <p:stCondLst>
+                                            <p:cond delay="0"/>
+                                          </p:stCondLst>
+                                        </p:cTn>
+                                        <p:tgtEl>
+                                          <p:spTgt spid="21"/>
+                                        </p:tgtEl>
+                                        <p:attrNameLst>
+                                          <p:attrName>style.visibility</p:attrName>
+                                        </p:attrNameLst>
+                                      </p:cBhvr>
+                                      <p:to>
+                                        <p:strVal val="visible"/>
+                                      </p:to>
+                                    </p:set>
+                                    <p:animEffect transition="in" filter="fade">
+                                      <p:cBhvr>
+                                        <p:cTn id="29" dur="500"/>
+                                        <p:tgtEl>
+                                          <p:spTgt spid="21"/>
+                                        </p:tgtEl>
+                                      </p:cBhvr>
+                                    </p:animEffect>
+                                  </p:childTnLst>
+                                </p:cTn>
+                              </p:par>
+                            </p:childTnLst>
+                          </p:cTn>
+                        </p:par>
+                      </p:childTnLst>
+                    </p:cTn>
+                  </p:par>
+                  <p:par>
+                    <p:cTn id="30" fill="hold">
+                      <p:stCondLst>
+                        <p:cond delay="indefinite"/>
+                      </p:stCondLst>
+                      <p:childTnLst>
+                        <p:par>
+                          <p:cTn id="31" fill="hold">
+                            <p:stCondLst>
+                              <p:cond delay="0"/>
+                            </p:stCondLst>
+                            <p:childTnLst>
+                              <p:par>
+                                <p:cTn id="32" presetID="10" presetClass="entr" presetSubtype="0" fill="hold" grpId="0" nodeType="clickEffect">
+                                  <p:stCondLst>
+                                    <p:cond delay="0"/>
+                                  </p:stCondLst>
+                                  <p:childTnLst>
+                                    <p:set>
+                                      <p:cBhvr>
+                                        <p:cTn id="33" dur="1" fill="hold">
+                                          <p:stCondLst>
+                                            <p:cond delay="0"/>
+                                          </p:stCondLst>
+                                        </p:cTn>
+                                        <p:tgtEl>
+                                          <p:spTgt spid="22"/>
+                                        </p:tgtEl>
+                                        <p:attrNameLst>
+                                          <p:attrName>style.visibility</p:attrName>
+                                        </p:attrNameLst>
+                                      </p:cBhvr>
+                                      <p:to>
+                                        <p:strVal val="visible"/>
+                                      </p:to>
+                                    </p:set>
+                                    <p:animEffect transition="in" filter="fade">
+                                      <p:cBhvr>
+                                        <p:cTn id="34" dur="500"/>
+                                        <p:tgtEl>
+                                          <p:spTgt spid="22"/>
+                                        </p:tgtEl>
+                                      </p:cBhvr>
+                                    </p:animEffect>
+                                  </p:childTnLst>
+                                </p:cTn>
+                              </p:par>
+                            </p:childTnLst>
+                          </p:cTn>
+                        </p:par>
+                      </p:childTnLst>
+                    </p:cTn>
+                  </p:par>
+                  <p:par>
+                    <p:cTn id="35" fill="hold">
+                      <p:stCondLst>
+                        <p:cond delay="indefinite"/>
+                      </p:stCondLst>
+                      <p:childTnLst>
+                        <p:par>
+                          <p:cTn id="36" fill="hold">
+                            <p:stCondLst>
+                              <p:cond delay="0"/>
+                            </p:stCondLst>
+                            <p:childTnLst>
+                              <p:par>
+                                <p:cTn id="37" presetID="10" presetClass="entr" presetSubtype="0" fill="hold" grpId="0" nodeType="clickEffect">
+                                  <p:stCondLst>
+                                    <p:cond delay="0"/>
+                                  </p:stCondLst>
+                                  <p:childTnLst>
+                                    <p:set>
+                                      <p:cBhvr>
+                                        <p:cTn id="38" dur="1" fill="hold">
+                                          <p:stCondLst>
+                                            <p:cond delay="0"/>
+                                          </p:stCondLst>
+                                        </p:cTn>
+                                        <p:tgtEl>
+                                          <p:spTgt spid="25"/>
+                                        </p:tgtEl>
+                                        <p:attrNameLst>
+                                          <p:attrName>style.visibility</p:attrName>
+                                        </p:attrNameLst>
+                                      </p:cBhvr>
+                                      <p:to>
+                                        <p:strVal val="visible"/>
+                                      </p:to>
+                                    </p:set>
+                                    <p:animEffect transition="in" filter="fade">
+                                      <p:cBhvr>
+                                        <p:cTn id="39" dur="500"/>
+                                        <p:tgtEl>
+                                          <p:spTgt spid="25"/>
+                                        </p:tgtEl>
+                                      </p:cBhvr>
+                                    </p:animEffect>
+                                  </p:childTnLst>
+                                </p:cTn>
+                              </p:par>
+                            </p:childTnLst>
+                          </p:cTn>
+                        </p:par>
+                      </p:childTnLst>
+                    </p:cTn>
+                  </p:par>
+                  <p:par>
+                    <p:cTn id="40" fill="hold">
+                      <p:stCondLst>
+                        <p:cond delay="indefinite"/>
+                      </p:stCondLst>
+                      <p:childTnLst>
+                        <p:par>
+                          <p:cTn id="41" fill="hold">
+                            <p:stCondLst>
+                              <p:cond delay="0"/>
+                            </p:stCondLst>
+                            <p:childTnLst>
+                              <p:par>
+                                <p:cTn id="42" presetID="10" presetClass="entr" presetSubtype="0" fill="hold" grpId="0" nodeType="clickEffect">
+                                  <p:stCondLst>
+                                    <p:cond delay="0"/>
+                                  </p:stCondLst>
+                                  <p:childTnLst>
+                                    <p:set>
+                                      <p:cBhvr>
+                                        <p:cTn id="43" dur="1" fill="hold">
+                                          <p:stCondLst>
+                                            <p:cond delay="0"/>
+                                          </p:stCondLst>
+                                        </p:cTn>
+                                        <p:tgtEl>
+                                          <p:spTgt spid="26"/>
+                                        </p:tgtEl>
+                                        <p:attrNameLst>
+                                          <p:attrName>style.visibility</p:attrName>
+                                        </p:attrNameLst>
+                                      </p:cBhvr>
+                                      <p:to>
+                                        <p:strVal val="visible"/>
+                                      </p:to>
+                                    </p:set>
+                                    <p:animEffect transition="in" filter="fade">
+                                      <p:cBhvr>
+                                        <p:cTn id="44" dur="500"/>
+                                        <p:tgtEl>
+                                          <p:spTgt spid="26"/>
+                                        </p:tgtEl>
+                                      </p:cBhvr>
+                                    </p:animEffect>
+                                  </p:childTnLst>
+                                </p:cTn>
+                              </p:par>
+                            </p:childTnLst>
+                          </p:cTn>
+                        </p:par>
+                      </p:childTnLst>
+                    </p:cTn>
+                  </p:par>
+                </p:childTnLst>
+              </p:cTn>
+              <p:prevCondLst>
+                <p:cond evt="onPrev" delay="0">
+                  <p:tgtEl>
+                    <p:sldTgt/>
+                  </p:tgtEl>
+                </p:cond>
+              </p:prevCondLst>
+              <p:nextCondLst>
+                <p:cond evt="onNext" delay="0">
+                  <p:tgtEl>
+                    <p:sldTgt/>
+                  </p:tgtEl>
+                </p:cond>
+              </p:nextCondLst>
+            </p:seq>
+          </p:childTnLst>
+        </p:cTn>
+      </p:par>
+    </p:tnLst>
+  </p:timing>
+</p:sld>
+</file>
+
+<file path=ppt/slides/slide23.xml><?xml version="1.0" encoding="utf-8"?>
+<p:sld xmlns:a="http://schemas.openxmlformats.org/drawingml/2006/main" xmlns:p="http://schemas.openxmlformats.org/presentationml/2006/main" xmlns:r="http://schemas.openxmlformats.org/officeDocument/2006/relationships">
+  <p:cSld>
+    <p:spTree>
+      <p:nvGrpSpPr>
+        <p:cNvPr id="1" name=""/>
+        <p:cNvGrpSpPr/>
+        <p:nvPr/>
+      </p:nvGrpSpPr>
+      <p:grpSpPr/>
+      <p:sp>
+        <p:nvSpPr>
+          <p:cNvPr id="2" name="Fondo"/>
+          <p:cNvSpPr/>
+          <p:nvPr/>
+        </p:nvSpPr>
+        <p:spPr>
+          <a:xfrm>
+            <a:off x="0" y="0"/>
+            <a:ext cx="12191695" cy="6858000"/>
+          </a:xfrm>
+          <a:prstGeom prst="rect">
+            <a:avLst/>
+          </a:prstGeom>
+          <a:solidFill>
+            <a:srgbClr val="FCFBF8"/>
+          </a:solidFill>
+          <a:ln>
+            <a:noFill/>
+          </a:ln>
+          <a:effectLst/>
+        </p:spPr>
+        <p:style>
+          <a:lnRef idx="1">
+            <a:schemeClr val="accent1"/>
+          </a:lnRef>
+          <a:fillRef idx="3">
+            <a:schemeClr val="accent1"/>
+          </a:fillRef>
+          <a:effectRef idx="2">
+            <a:schemeClr val="accent1"/>
+          </a:effectRef>
+          <a:fontRef idx="minor">
+            <a:schemeClr val="lt1"/>
+          </a:fontRef>
+        </p:style>
+        <p:txBody>
+          <a:bodyPr rtlCol="0" anchor="ctr"/>
+          <a:lstStyle/>
+          <a:p/>
+        </p:txBody>
+      </p:sp>
+      <p:sp>
+        <p:nvSpPr>
+          <p:cNvPr id="3" name="Cabecera"/>
+          <p:cNvSpPr/>
+          <p:nvPr/>
+        </p:nvSpPr>
+        <p:spPr>
+          <a:xfrm>
+            <a:off x="0" y="0"/>
+            <a:ext cx="12191695" cy="1078992"/>
+          </a:xfrm>
+          <a:prstGeom prst="rect">
+            <a:avLst/>
+          </a:prstGeom>
+          <a:solidFill>
+            <a:srgbClr val="1E9E74"/>
+          </a:solidFill>
+          <a:ln>
+            <a:noFill/>
+          </a:ln>
+          <a:effectLst/>
+        </p:spPr>
+        <p:style>
+          <a:lnRef idx="1">
+            <a:schemeClr val="accent1"/>
+          </a:lnRef>
+          <a:fillRef idx="3">
+            <a:schemeClr val="accent1"/>
+          </a:fillRef>
+          <a:effectRef idx="2">
+            <a:schemeClr val="accent1"/>
+          </a:effectRef>
+          <a:fontRef idx="minor">
+            <a:schemeClr val="lt1"/>
+          </a:fontRef>
+        </p:style>
+        <p:txBody>
+          <a:bodyPr rtlCol="0" anchor="ctr"/>
+          <a:lstStyle/>
+          <a:p/>
+        </p:txBody>
+      </p:sp>
+      <p:sp>
+        <p:nvSpPr>
+          <p:cNvPr id="4" name="Chip"/>
+          <p:cNvSpPr/>
+          <p:nvPr/>
+        </p:nvSpPr>
+        <p:spPr>
+          <a:xfrm>
+            <a:off x="457200" y="182880"/>
+            <a:ext cx="3017520" cy="292608"/>
+          </a:xfrm>
+          <a:prstGeom prst="roundRect">
+            <a:avLst>
+              <a:gd name="adj" fmla="val 50000"/>
+            </a:avLst>
+          </a:prstGeom>
+          <a:solidFill>
+            <a:srgbClr val="FFFFFF"/>
+          </a:solidFill>
+          <a:ln>
+            <a:noFill/>
+          </a:ln>
+          <a:effectLst/>
+        </p:spPr>
+        <p:style>
+          <a:lnRef idx="1">
+            <a:schemeClr val="accent1"/>
+          </a:lnRef>
+          <a:fillRef idx="3">
+            <a:schemeClr val="accent1"/>
+          </a:fillRef>
+          <a:effectRef idx="2">
+            <a:schemeClr val="accent1"/>
+          </a:effectRef>
+          <a:fontRef idx="minor">
+            <a:schemeClr val="lt1"/>
+          </a:fontRef>
+        </p:style>
+        <p:txBody>
+          <a:bodyPr rtlCol="0" anchor="ctr"/>
+          <a:lstStyle/>
+          <a:p/>
+        </p:txBody>
+      </p:sp>
+      <p:sp>
+        <p:nvSpPr>
+          <p:cNvPr id="5" name="ChipTxt"/>
+          <p:cNvSpPr txBox="1"/>
+          <p:nvPr/>
+        </p:nvSpPr>
+        <p:spPr>
+          <a:xfrm>
+            <a:off x="457200" y="173736"/>
+            <a:ext cx="3017520" cy="310896"/>
+          </a:xfrm>
+          <a:prstGeom prst="rect">
+            <a:avLst/>
+          </a:prstGeom>
+          <a:noFill/>
+        </p:spPr>
+        <p:txBody>
+          <a:bodyPr wrap="square" anchor="ctr" lIns="45720" rIns="45720" tIns="27432" bIns="27432">
+            <a:normAutofit/>
+          </a:bodyPr>
+          <a:lstStyle/>
+          <a:p>
+            <a:pPr algn="ctr"/>
+            <a:r>
+              <a:rPr sz="950" b="1">
+                <a:solidFill>
+                  <a:srgbClr val="157355"/>
+                </a:solidFill>
+                <a:latin typeface="Inter"/>
+              </a:rPr>
+              <a:t>RETO 2 · SIMULATIE MET BEPERKING</a:t>
+            </a:r>
+          </a:p>
+        </p:txBody>
+      </p:sp>
+      <p:sp>
+        <p:nvSpPr>
+          <p:cNvPr id="6" name="Titulo"/>
+          <p:cNvSpPr txBox="1"/>
+          <p:nvPr/>
+        </p:nvSpPr>
+        <p:spPr>
+          <a:xfrm>
+            <a:off x="457200" y="502920"/>
+            <a:ext cx="8412480" cy="475488"/>
+          </a:xfrm>
+          <a:prstGeom prst="rect">
+            <a:avLst/>
+          </a:prstGeom>
+          <a:noFill/>
+        </p:spPr>
+        <p:txBody>
+          <a:bodyPr wrap="square" anchor="t" lIns="45720" rIns="45720" tIns="27432" bIns="27432">
+            <a:normAutofit/>
+          </a:bodyPr>
+          <a:lstStyle/>
+          <a:p>
+            <a:pPr algn="l"/>
+            <a:r>
+              <a:rPr sz="2700" b="1">
+                <a:solidFill>
+                  <a:srgbClr val="FFFFFF"/>
+                </a:solidFill>
+                <a:latin typeface="Bricolage Grotesque"/>
+              </a:rPr>
+              <a:t>Devolución imposible</a:t>
+            </a:r>
+          </a:p>
+        </p:txBody>
+      </p:sp>
+      <p:sp>
+        <p:nvSpPr>
+          <p:cNvPr id="7" name="Badges"/>
+          <p:cNvSpPr txBox="1"/>
+          <p:nvPr/>
+        </p:nvSpPr>
+        <p:spPr>
+          <a:xfrm>
+            <a:off x="9052560" y="256032"/>
+            <a:ext cx="2651760" cy="640080"/>
+          </a:xfrm>
+          <a:prstGeom prst="rect">
+            <a:avLst/>
+          </a:prstGeom>
+          <a:noFill/>
+        </p:spPr>
+        <p:txBody>
+          <a:bodyPr wrap="square" anchor="t" lIns="45720" rIns="45720" tIns="27432" bIns="27432">
+            <a:normAutofit/>
+          </a:bodyPr>
+          <a:lstStyle/>
+          <a:p>
+            <a:pPr algn="r"/>
+            <a:r>
+              <a:rPr sz="1000">
+                <a:solidFill>
+                  <a:srgbClr val="E4F4EE"/>
+                </a:solidFill>
+                <a:latin typeface="Inter"/>
+              </a:rPr>
+              <a:t>👥 En parejas</a:t>
+            </a:r>
+          </a:p>
+          <a:p>
+            <a:pPr algn="r"/>
+            <a:r>
+              <a:rPr sz="1000">
+                <a:solidFill>
+                  <a:srgbClr val="E4F4EE"/>
+                </a:solidFill>
+                <a:latin typeface="Inter"/>
+              </a:rPr>
+              <a:t>± 12 min · ★★★</a:t>
+            </a:r>
+          </a:p>
+        </p:txBody>
+      </p:sp>
+      <p:sp>
+        <p:nvSpPr>
+          <p:cNvPr id="8" name="Gancho"/>
+          <p:cNvSpPr txBox="1"/>
+          <p:nvPr/>
+        </p:nvSpPr>
+        <p:spPr>
+          <a:xfrm>
+            <a:off x="457200" y="1225296"/>
+            <a:ext cx="11274552" cy="566928"/>
+          </a:xfrm>
+          <a:prstGeom prst="rect">
+            <a:avLst/>
+          </a:prstGeom>
+          <a:noFill/>
+        </p:spPr>
+        <p:txBody>
+          <a:bodyPr wrap="square" anchor="t" lIns="45720" rIns="45720" tIns="27432" bIns="27432">
+            <a:normAutofit/>
+          </a:bodyPr>
+          <a:lstStyle/>
+          <a:p>
+            <a:pPr algn="l"/>
+            <a:r>
+              <a:rPr sz="1600" b="1">
+                <a:solidFill>
+                  <a:srgbClr val="157355"/>
+                </a:solidFill>
+                <a:latin typeface="Bricolage Grotesque"/>
+              </a:rPr>
+              <a:t>Quieres devolver algo. No tienes el ticket.</a:t>
+            </a:r>
+          </a:p>
+          <a:p>
+            <a:pPr algn="l"/>
+            <a:r>
+              <a:rPr sz="1100" i="1">
+                <a:solidFill>
+                  <a:srgbClr val="6A6E78"/>
+                </a:solidFill>
+                <a:latin typeface="Inter"/>
+              </a:rPr>
+              <a:t>Je wil iets terugbrengen. Je hebt geen kassabon.</a:t>
+            </a:r>
+          </a:p>
+        </p:txBody>
+      </p:sp>
+      <p:sp>
+        <p:nvSpPr>
+          <p:cNvPr id="9" name="ReglaCaja"/>
+          <p:cNvSpPr/>
+          <p:nvPr/>
+        </p:nvSpPr>
+        <p:spPr>
+          <a:xfrm>
+            <a:off x="457200" y="1847088"/>
+            <a:ext cx="11274552" cy="658368"/>
+          </a:xfrm>
+          <a:prstGeom prst="roundRect">
+            <a:avLst>
+              <a:gd name="adj" fmla="val 5000"/>
+            </a:avLst>
+          </a:prstGeom>
+          <a:solidFill>
+            <a:srgbClr val="FBF3D6"/>
+          </a:solidFill>
+          <a:ln>
+            <a:noFill/>
+          </a:ln>
+          <a:effectLst/>
+        </p:spPr>
+        <p:style>
+          <a:lnRef idx="1">
+            <a:schemeClr val="accent1"/>
+          </a:lnRef>
+          <a:fillRef idx="3">
+            <a:schemeClr val="accent1"/>
+          </a:fillRef>
+          <a:effectRef idx="2">
+            <a:schemeClr val="accent1"/>
+          </a:effectRef>
+          <a:fontRef idx="minor">
+            <a:schemeClr val="lt1"/>
+          </a:fontRef>
+        </p:style>
+        <p:txBody>
+          <a:bodyPr rtlCol="0" anchor="ctr"/>
+          <a:lstStyle/>
+          <a:p/>
+        </p:txBody>
+      </p:sp>
+      <p:sp>
+        <p:nvSpPr>
+          <p:cNvPr id="10" name="ReglaTxt"/>
+          <p:cNvSpPr txBox="1"/>
+          <p:nvPr/>
+        </p:nvSpPr>
+        <p:spPr>
+          <a:xfrm>
+            <a:off x="603504" y="1883664"/>
+            <a:ext cx="10972800" cy="585216"/>
+          </a:xfrm>
+          <a:prstGeom prst="rect">
+            <a:avLst/>
+          </a:prstGeom>
+          <a:noFill/>
+        </p:spPr>
+        <p:txBody>
+          <a:bodyPr wrap="square" anchor="t" lIns="45720" rIns="45720" tIns="27432" bIns="27432">
+            <a:normAutofit/>
+          </a:bodyPr>
+          <a:lstStyle/>
+          <a:p>
+            <a:pPr algn="l"/>
+            <a:r>
+              <a:rPr sz="850" b="1">
+                <a:solidFill>
+                  <a:srgbClr val="B7860B"/>
+                </a:solidFill>
+                <a:latin typeface="Inter"/>
+              </a:rPr>
+              <a:t>LA REGLA DEL RETO</a:t>
+            </a:r>
+          </a:p>
+          <a:p>
+            <a:pPr algn="l"/>
+            <a:r>
+              <a:rPr sz="1100">
+                <a:solidFill>
+                  <a:srgbClr val="20242E"/>
+                </a:solidFill>
+                <a:latin typeface="Inter"/>
+              </a:rPr>
+              <a:t>Je mag elk argument maar één keer gebruiken. Op wie in herhaling valt, hoeft de verkoper niet meer te antwoorden.</a:t>
+            </a:r>
+          </a:p>
+        </p:txBody>
+      </p:sp>
+      <p:sp>
+        <p:nvSpPr>
+          <p:cNvPr id="11" name="Tarjeta 0"/>
+          <p:cNvSpPr/>
+          <p:nvPr/>
+        </p:nvSpPr>
+        <p:spPr>
+          <a:xfrm>
+            <a:off x="457200" y="2670048"/>
+            <a:ext cx="2708910" cy="1170432"/>
+          </a:xfrm>
+          <a:prstGeom prst="roundRect">
+            <a:avLst>
+              <a:gd name="adj" fmla="val 6000"/>
+            </a:avLst>
+          </a:prstGeom>
+          <a:solidFill>
+            <a:srgbClr val="FFFFFF"/>
+          </a:solidFill>
+          <a:ln w="12700">
+            <a:solidFill>
+              <a:srgbClr val="E4E3DE"/>
+            </a:solidFill>
+          </a:ln>
+          <a:effectLst/>
+        </p:spPr>
+        <p:style>
+          <a:lnRef idx="1">
+            <a:schemeClr val="accent1"/>
+          </a:lnRef>
+          <a:fillRef idx="3">
+            <a:schemeClr val="accent1"/>
+          </a:fillRef>
+          <a:effectRef idx="2">
+            <a:schemeClr val="accent1"/>
+          </a:effectRef>
+          <a:fontRef idx="minor">
+            <a:schemeClr val="lt1"/>
+          </a:fontRef>
+        </p:style>
+        <p:txBody>
+          <a:bodyPr rtlCol="0" anchor="ctr"/>
+          <a:lstStyle/>
+          <a:p/>
+        </p:txBody>
+      </p:sp>
+      <p:sp>
+        <p:nvSpPr>
+          <p:cNvPr id="12" name="TarjetaTxt 0"/>
+          <p:cNvSpPr txBox="1"/>
+          <p:nvPr/>
+        </p:nvSpPr>
+        <p:spPr>
+          <a:xfrm>
+            <a:off x="548640" y="2724912"/>
+            <a:ext cx="2526030" cy="1060704"/>
+          </a:xfrm>
+          <a:prstGeom prst="rect">
+            <a:avLst/>
+          </a:prstGeom>
+          <a:noFill/>
+        </p:spPr>
+        <p:txBody>
+          <a:bodyPr wrap="square" anchor="t" lIns="45720" rIns="45720" tIns="27432" bIns="27432">
+            <a:normAutofit/>
+          </a:bodyPr>
+          <a:lstStyle/>
+          <a:p>
+            <a:pPr algn="l"/>
+            <a:r>
+              <a:rPr sz="1100" b="1">
+                <a:solidFill>
+                  <a:srgbClr val="157355"/>
+                </a:solidFill>
+                <a:latin typeface="Bricolage Grotesque"/>
+              </a:rPr>
+              <a:t>La tienda dice</a:t>
+            </a:r>
+          </a:p>
+          <a:p>
+            <a:pPr algn="l"/>
+            <a:r>
+              <a:rPr sz="1000">
+                <a:solidFill>
+                  <a:srgbClr val="20242E"/>
+                </a:solidFill>
+                <a:latin typeface="Inter"/>
+              </a:rPr>
+              <a:t>Sin ticket no puedo hacer nada.</a:t>
+            </a:r>
+          </a:p>
+        </p:txBody>
+      </p:sp>
+      <p:sp>
+        <p:nvSpPr>
+          <p:cNvPr id="13" name="Tarjeta 1"/>
+          <p:cNvSpPr/>
+          <p:nvPr/>
+        </p:nvSpPr>
+        <p:spPr>
+          <a:xfrm>
+            <a:off x="3312414" y="2670048"/>
+            <a:ext cx="2708910" cy="1170432"/>
+          </a:xfrm>
+          <a:prstGeom prst="roundRect">
+            <a:avLst>
+              <a:gd name="adj" fmla="val 6000"/>
+            </a:avLst>
+          </a:prstGeom>
+          <a:solidFill>
+            <a:srgbClr val="FFFFFF"/>
+          </a:solidFill>
+          <a:ln w="12700">
+            <a:solidFill>
+              <a:srgbClr val="E4E3DE"/>
+            </a:solidFill>
+          </a:ln>
+          <a:effectLst/>
+        </p:spPr>
+        <p:style>
+          <a:lnRef idx="1">
+            <a:schemeClr val="accent1"/>
+          </a:lnRef>
+          <a:fillRef idx="3">
+            <a:schemeClr val="accent1"/>
+          </a:fillRef>
+          <a:effectRef idx="2">
+            <a:schemeClr val="accent1"/>
+          </a:effectRef>
+          <a:fontRef idx="minor">
+            <a:schemeClr val="lt1"/>
+          </a:fontRef>
+        </p:style>
+        <p:txBody>
+          <a:bodyPr rtlCol="0" anchor="ctr"/>
+          <a:lstStyle/>
+          <a:p/>
+        </p:txBody>
+      </p:sp>
+      <p:sp>
+        <p:nvSpPr>
+          <p:cNvPr id="14" name="TarjetaTxt 1"/>
+          <p:cNvSpPr txBox="1"/>
+          <p:nvPr/>
+        </p:nvSpPr>
+        <p:spPr>
+          <a:xfrm>
+            <a:off x="3403854" y="2724912"/>
+            <a:ext cx="2526030" cy="1060704"/>
+          </a:xfrm>
+          <a:prstGeom prst="rect">
+            <a:avLst/>
+          </a:prstGeom>
+          <a:noFill/>
+        </p:spPr>
+        <p:txBody>
+          <a:bodyPr wrap="square" anchor="t" lIns="45720" rIns="45720" tIns="27432" bIns="27432">
+            <a:normAutofit/>
+          </a:bodyPr>
+          <a:lstStyle/>
+          <a:p>
+            <a:pPr algn="l"/>
+            <a:r>
+              <a:rPr sz="1100" b="1">
+                <a:solidFill>
+                  <a:srgbClr val="157355"/>
+                </a:solidFill>
+                <a:latin typeface="Bricolage Grotesque"/>
+              </a:rPr>
+              <a:t>La tienda dice</a:t>
+            </a:r>
+          </a:p>
+          <a:p>
+            <a:pPr algn="l"/>
+            <a:r>
+              <a:rPr sz="1000">
+                <a:solidFill>
+                  <a:srgbClr val="20242E"/>
+                </a:solidFill>
+                <a:latin typeface="Inter"/>
+              </a:rPr>
+              <a:t>Ya la ha llevado, mire la etiqueta.</a:t>
+            </a:r>
+          </a:p>
+        </p:txBody>
+      </p:sp>
+      <p:sp>
+        <p:nvSpPr>
+          <p:cNvPr id="15" name="Tarjeta 2"/>
+          <p:cNvSpPr/>
+          <p:nvPr/>
+        </p:nvSpPr>
+        <p:spPr>
+          <a:xfrm>
+            <a:off x="6167628" y="2670048"/>
+            <a:ext cx="2708910" cy="1170432"/>
+          </a:xfrm>
+          <a:prstGeom prst="roundRect">
+            <a:avLst>
+              <a:gd name="adj" fmla="val 6000"/>
+            </a:avLst>
+          </a:prstGeom>
+          <a:solidFill>
+            <a:srgbClr val="FFFFFF"/>
+          </a:solidFill>
+          <a:ln w="12700">
+            <a:solidFill>
+              <a:srgbClr val="E4E3DE"/>
+            </a:solidFill>
+          </a:ln>
+          <a:effectLst/>
+        </p:spPr>
+        <p:style>
+          <a:lnRef idx="1">
+            <a:schemeClr val="accent1"/>
+          </a:lnRef>
+          <a:fillRef idx="3">
+            <a:schemeClr val="accent1"/>
+          </a:fillRef>
+          <a:effectRef idx="2">
+            <a:schemeClr val="accent1"/>
+          </a:effectRef>
+          <a:fontRef idx="minor">
+            <a:schemeClr val="lt1"/>
+          </a:fontRef>
+        </p:style>
+        <p:txBody>
+          <a:bodyPr rtlCol="0" anchor="ctr"/>
+          <a:lstStyle/>
+          <a:p/>
+        </p:txBody>
+      </p:sp>
+      <p:sp>
+        <p:nvSpPr>
+          <p:cNvPr id="16" name="TarjetaTxt 2"/>
+          <p:cNvSpPr txBox="1"/>
+          <p:nvPr/>
+        </p:nvSpPr>
+        <p:spPr>
+          <a:xfrm>
+            <a:off x="6259068" y="2724912"/>
+            <a:ext cx="2526030" cy="1060704"/>
+          </a:xfrm>
+          <a:prstGeom prst="rect">
+            <a:avLst/>
+          </a:prstGeom>
+          <a:noFill/>
+        </p:spPr>
+        <p:txBody>
+          <a:bodyPr wrap="square" anchor="t" lIns="45720" rIns="45720" tIns="27432" bIns="27432">
+            <a:normAutofit/>
+          </a:bodyPr>
+          <a:lstStyle/>
+          <a:p>
+            <a:pPr algn="l"/>
+            <a:r>
+              <a:rPr sz="1100" b="1">
+                <a:solidFill>
+                  <a:srgbClr val="157355"/>
+                </a:solidFill>
+                <a:latin typeface="Bricolage Grotesque"/>
+              </a:rPr>
+              <a:t>La tienda dice</a:t>
+            </a:r>
+          </a:p>
+          <a:p>
+            <a:pPr algn="l"/>
+            <a:r>
+              <a:rPr sz="1000">
+                <a:solidFill>
+                  <a:srgbClr val="20242E"/>
+                </a:solidFill>
+                <a:latin typeface="Inter"/>
+              </a:rPr>
+              <a:t>La política de la tienda es de quince días.</a:t>
+            </a:r>
+          </a:p>
+        </p:txBody>
+      </p:sp>
+      <p:sp>
+        <p:nvSpPr>
+          <p:cNvPr id="17" name="Tarjeta 3"/>
+          <p:cNvSpPr/>
+          <p:nvPr/>
+        </p:nvSpPr>
+        <p:spPr>
+          <a:xfrm>
+            <a:off x="9022842" y="2670048"/>
+            <a:ext cx="2708910" cy="1170432"/>
+          </a:xfrm>
+          <a:prstGeom prst="roundRect">
+            <a:avLst>
+              <a:gd name="adj" fmla="val 6000"/>
+            </a:avLst>
+          </a:prstGeom>
+          <a:solidFill>
+            <a:srgbClr val="FFFFFF"/>
+          </a:solidFill>
+          <a:ln w="12700">
+            <a:solidFill>
+              <a:srgbClr val="E4E3DE"/>
+            </a:solidFill>
+          </a:ln>
+          <a:effectLst/>
+        </p:spPr>
+        <p:style>
+          <a:lnRef idx="1">
+            <a:schemeClr val="accent1"/>
+          </a:lnRef>
+          <a:fillRef idx="3">
+            <a:schemeClr val="accent1"/>
+          </a:fillRef>
+          <a:effectRef idx="2">
+            <a:schemeClr val="accent1"/>
+          </a:effectRef>
+          <a:fontRef idx="minor">
+            <a:schemeClr val="lt1"/>
+          </a:fontRef>
+        </p:style>
+        <p:txBody>
+          <a:bodyPr rtlCol="0" anchor="ctr"/>
+          <a:lstStyle/>
+          <a:p/>
+        </p:txBody>
+      </p:sp>
+      <p:sp>
+        <p:nvSpPr>
+          <p:cNvPr id="18" name="TarjetaTxt 3"/>
+          <p:cNvSpPr txBox="1"/>
+          <p:nvPr/>
+        </p:nvSpPr>
+        <p:spPr>
+          <a:xfrm>
+            <a:off x="9114282" y="2724912"/>
+            <a:ext cx="2526030" cy="1060704"/>
+          </a:xfrm>
+          <a:prstGeom prst="rect">
+            <a:avLst/>
+          </a:prstGeom>
+          <a:noFill/>
+        </p:spPr>
+        <p:txBody>
+          <a:bodyPr wrap="square" anchor="t" lIns="45720" rIns="45720" tIns="27432" bIns="27432">
+            <a:normAutofit/>
+          </a:bodyPr>
+          <a:lstStyle/>
+          <a:p>
+            <a:pPr algn="l"/>
+            <a:r>
+              <a:rPr sz="1100" b="1">
+                <a:solidFill>
+                  <a:srgbClr val="157355"/>
+                </a:solidFill>
+                <a:latin typeface="Bricolage Grotesque"/>
+              </a:rPr>
+              <a:t>Tu argumento</a:t>
+            </a:r>
+          </a:p>
+          <a:p>
+            <a:pPr algn="l"/>
+            <a:r>
+              <a:rPr sz="1000">
+                <a:solidFill>
+                  <a:srgbClr val="20242E"/>
+                </a:solidFill>
+                <a:latin typeface="Inter"/>
+              </a:rPr>
+              <a:t>La compré aquí la semana pasada, me acuerdo del vendedor.</a:t>
+            </a:r>
+          </a:p>
+        </p:txBody>
+      </p:sp>
+      <p:sp>
+        <p:nvSpPr>
+          <p:cNvPr id="19" name="Tarjeta 4"/>
+          <p:cNvSpPr/>
+          <p:nvPr/>
+        </p:nvSpPr>
+        <p:spPr>
+          <a:xfrm>
+            <a:off x="457200" y="3968496"/>
+            <a:ext cx="2708910" cy="1170432"/>
+          </a:xfrm>
+          <a:prstGeom prst="roundRect">
+            <a:avLst>
+              <a:gd name="adj" fmla="val 6000"/>
+            </a:avLst>
+          </a:prstGeom>
+          <a:solidFill>
+            <a:srgbClr val="FFFFFF"/>
+          </a:solidFill>
+          <a:ln w="12700">
+            <a:solidFill>
+              <a:srgbClr val="E4E3DE"/>
+            </a:solidFill>
+          </a:ln>
+          <a:effectLst/>
+        </p:spPr>
+        <p:style>
+          <a:lnRef idx="1">
+            <a:schemeClr val="accent1"/>
+          </a:lnRef>
+          <a:fillRef idx="3">
+            <a:schemeClr val="accent1"/>
+          </a:fillRef>
+          <a:effectRef idx="2">
+            <a:schemeClr val="accent1"/>
+          </a:effectRef>
+          <a:fontRef idx="minor">
+            <a:schemeClr val="lt1"/>
+          </a:fontRef>
+        </p:style>
+        <p:txBody>
+          <a:bodyPr rtlCol="0" anchor="ctr"/>
+          <a:lstStyle/>
+          <a:p/>
+        </p:txBody>
+      </p:sp>
+      <p:sp>
+        <p:nvSpPr>
+          <p:cNvPr id="20" name="TarjetaTxt 4"/>
+          <p:cNvSpPr txBox="1"/>
+          <p:nvPr/>
+        </p:nvSpPr>
+        <p:spPr>
+          <a:xfrm>
+            <a:off x="548640" y="4023360"/>
+            <a:ext cx="2526030" cy="1060704"/>
+          </a:xfrm>
+          <a:prstGeom prst="rect">
+            <a:avLst/>
+          </a:prstGeom>
+          <a:noFill/>
+        </p:spPr>
+        <p:txBody>
+          <a:bodyPr wrap="square" anchor="t" lIns="45720" rIns="45720" tIns="27432" bIns="27432">
+            <a:normAutofit/>
+          </a:bodyPr>
+          <a:lstStyle/>
+          <a:p>
+            <a:pPr algn="l"/>
+            <a:r>
+              <a:rPr sz="1100" b="1">
+                <a:solidFill>
+                  <a:srgbClr val="157355"/>
+                </a:solidFill>
+                <a:latin typeface="Bricolage Grotesque"/>
+              </a:rPr>
+              <a:t>Tu argumento</a:t>
+            </a:r>
+          </a:p>
+          <a:p>
+            <a:pPr algn="l"/>
+            <a:r>
+              <a:rPr sz="1000">
+                <a:solidFill>
+                  <a:srgbClr val="20242E"/>
+                </a:solidFill>
+                <a:latin typeface="Inter"/>
+              </a:rPr>
+              <a:t>No la he llevado, solo me la he probado en casa.</a:t>
+            </a:r>
+          </a:p>
+        </p:txBody>
+      </p:sp>
+      <p:sp>
+        <p:nvSpPr>
+          <p:cNvPr id="21" name="Tarjeta 5"/>
+          <p:cNvSpPr/>
+          <p:nvPr/>
+        </p:nvSpPr>
+        <p:spPr>
+          <a:xfrm>
+            <a:off x="3312414" y="3968496"/>
+            <a:ext cx="2708910" cy="1170432"/>
+          </a:xfrm>
+          <a:prstGeom prst="roundRect">
+            <a:avLst>
+              <a:gd name="adj" fmla="val 6000"/>
+            </a:avLst>
+          </a:prstGeom>
+          <a:solidFill>
+            <a:srgbClr val="FFFFFF"/>
+          </a:solidFill>
+          <a:ln w="12700">
+            <a:solidFill>
+              <a:srgbClr val="E4E3DE"/>
+            </a:solidFill>
+          </a:ln>
+          <a:effectLst/>
+        </p:spPr>
+        <p:style>
+          <a:lnRef idx="1">
+            <a:schemeClr val="accent1"/>
+          </a:lnRef>
+          <a:fillRef idx="3">
+            <a:schemeClr val="accent1"/>
+          </a:fillRef>
+          <a:effectRef idx="2">
+            <a:schemeClr val="accent1"/>
+          </a:effectRef>
+          <a:fontRef idx="minor">
+            <a:schemeClr val="lt1"/>
+          </a:fontRef>
+        </p:style>
+        <p:txBody>
+          <a:bodyPr rtlCol="0" anchor="ctr"/>
+          <a:lstStyle/>
+          <a:p/>
+        </p:txBody>
+      </p:sp>
+      <p:sp>
+        <p:nvSpPr>
+          <p:cNvPr id="22" name="TarjetaTxt 5"/>
+          <p:cNvSpPr txBox="1"/>
+          <p:nvPr/>
+        </p:nvSpPr>
+        <p:spPr>
+          <a:xfrm>
+            <a:off x="3403854" y="4023360"/>
+            <a:ext cx="2526030" cy="1060704"/>
+          </a:xfrm>
+          <a:prstGeom prst="rect">
+            <a:avLst/>
+          </a:prstGeom>
+          <a:noFill/>
+        </p:spPr>
+        <p:txBody>
+          <a:bodyPr wrap="square" anchor="t" lIns="45720" rIns="45720" tIns="27432" bIns="27432">
+            <a:normAutofit/>
+          </a:bodyPr>
+          <a:lstStyle/>
+          <a:p>
+            <a:pPr algn="l"/>
+            <a:r>
+              <a:rPr sz="1100" b="1">
+                <a:solidFill>
+                  <a:srgbClr val="157355"/>
+                </a:solidFill>
+                <a:latin typeface="Bricolage Grotesque"/>
+              </a:rPr>
+              <a:t>Tu argumento</a:t>
+            </a:r>
+          </a:p>
+          <a:p>
+            <a:pPr algn="l"/>
+            <a:r>
+              <a:rPr sz="1000">
+                <a:solidFill>
+                  <a:srgbClr val="20242E"/>
+                </a:solidFill>
+                <a:latin typeface="Inter"/>
+              </a:rPr>
+              <a:t>Solo quiero cambiarla por otra talla, no el dinero.</a:t>
+            </a:r>
+          </a:p>
+        </p:txBody>
+      </p:sp>
+      <p:sp>
+        <p:nvSpPr>
+          <p:cNvPr id="23" name="Tarjeta 6"/>
+          <p:cNvSpPr/>
+          <p:nvPr/>
+        </p:nvSpPr>
+        <p:spPr>
+          <a:xfrm>
+            <a:off x="6167628" y="3968496"/>
+            <a:ext cx="2708910" cy="1170432"/>
+          </a:xfrm>
+          <a:prstGeom prst="roundRect">
+            <a:avLst>
+              <a:gd name="adj" fmla="val 6000"/>
+            </a:avLst>
+          </a:prstGeom>
+          <a:solidFill>
+            <a:srgbClr val="FFFFFF"/>
+          </a:solidFill>
+          <a:ln w="12700">
+            <a:solidFill>
+              <a:srgbClr val="E4E3DE"/>
+            </a:solidFill>
+          </a:ln>
+          <a:effectLst/>
+        </p:spPr>
+        <p:style>
+          <a:lnRef idx="1">
+            <a:schemeClr val="accent1"/>
+          </a:lnRef>
+          <a:fillRef idx="3">
+            <a:schemeClr val="accent1"/>
+          </a:fillRef>
+          <a:effectRef idx="2">
+            <a:schemeClr val="accent1"/>
+          </a:effectRef>
+          <a:fontRef idx="minor">
+            <a:schemeClr val="lt1"/>
+          </a:fontRef>
+        </p:style>
+        <p:txBody>
+          <a:bodyPr rtlCol="0" anchor="ctr"/>
+          <a:lstStyle/>
+          <a:p/>
+        </p:txBody>
+      </p:sp>
+      <p:sp>
+        <p:nvSpPr>
+          <p:cNvPr id="24" name="TarjetaTxt 6"/>
+          <p:cNvSpPr txBox="1"/>
+          <p:nvPr/>
+        </p:nvSpPr>
+        <p:spPr>
+          <a:xfrm>
+            <a:off x="6259068" y="4023360"/>
+            <a:ext cx="2526030" cy="1060704"/>
+          </a:xfrm>
+          <a:prstGeom prst="rect">
+            <a:avLst/>
+          </a:prstGeom>
+          <a:noFill/>
+        </p:spPr>
+        <p:txBody>
+          <a:bodyPr wrap="square" anchor="t" lIns="45720" rIns="45720" tIns="27432" bIns="27432">
+            <a:normAutofit/>
+          </a:bodyPr>
+          <a:lstStyle/>
+          <a:p>
+            <a:pPr algn="l"/>
+            <a:r>
+              <a:rPr sz="1100" b="1">
+                <a:solidFill>
+                  <a:srgbClr val="157355"/>
+                </a:solidFill>
+                <a:latin typeface="Bricolage Grotesque"/>
+              </a:rPr>
+              <a:t>salida posible</a:t>
+            </a:r>
+          </a:p>
+          <a:p>
+            <a:pPr algn="l"/>
+            <a:r>
+              <a:rPr sz="1000">
+                <a:solidFill>
+                  <a:srgbClr val="20242E"/>
+                </a:solidFill>
+                <a:latin typeface="Inter"/>
+              </a:rPr>
+              <a:t>cambio por otra talla</a:t>
+            </a:r>
+          </a:p>
+        </p:txBody>
+      </p:sp>
+      <p:sp>
+        <p:nvSpPr>
+          <p:cNvPr id="25" name="Tarjeta 7"/>
+          <p:cNvSpPr/>
+          <p:nvPr/>
+        </p:nvSpPr>
+        <p:spPr>
+          <a:xfrm>
+            <a:off x="9022842" y="3968496"/>
+            <a:ext cx="2708910" cy="1170432"/>
+          </a:xfrm>
+          <a:prstGeom prst="roundRect">
+            <a:avLst>
+              <a:gd name="adj" fmla="val 6000"/>
+            </a:avLst>
+          </a:prstGeom>
+          <a:solidFill>
+            <a:srgbClr val="FFFFFF"/>
+          </a:solidFill>
+          <a:ln w="12700">
+            <a:solidFill>
+              <a:srgbClr val="E4E3DE"/>
+            </a:solidFill>
+          </a:ln>
+          <a:effectLst/>
+        </p:spPr>
+        <p:style>
+          <a:lnRef idx="1">
+            <a:schemeClr val="accent1"/>
+          </a:lnRef>
+          <a:fillRef idx="3">
+            <a:schemeClr val="accent1"/>
+          </a:fillRef>
+          <a:effectRef idx="2">
+            <a:schemeClr val="accent1"/>
+          </a:effectRef>
+          <a:fontRef idx="minor">
+            <a:schemeClr val="lt1"/>
+          </a:fontRef>
+        </p:style>
+        <p:txBody>
+          <a:bodyPr rtlCol="0" anchor="ctr"/>
+          <a:lstStyle/>
+          <a:p/>
+        </p:txBody>
+      </p:sp>
+      <p:sp>
+        <p:nvSpPr>
+          <p:cNvPr id="26" name="TarjetaTxt 7"/>
+          <p:cNvSpPr txBox="1"/>
+          <p:nvPr/>
+        </p:nvSpPr>
+        <p:spPr>
+          <a:xfrm>
+            <a:off x="9114282" y="4023360"/>
+            <a:ext cx="2526030" cy="1060704"/>
+          </a:xfrm>
+          <a:prstGeom prst="rect">
+            <a:avLst/>
+          </a:prstGeom>
+          <a:noFill/>
+        </p:spPr>
+        <p:txBody>
+          <a:bodyPr wrap="square" anchor="t" lIns="45720" rIns="45720" tIns="27432" bIns="27432">
+            <a:normAutofit/>
+          </a:bodyPr>
+          <a:lstStyle/>
+          <a:p>
+            <a:pPr algn="l"/>
+            <a:r>
+              <a:rPr sz="1100" b="1">
+                <a:solidFill>
+                  <a:srgbClr val="157355"/>
+                </a:solidFill>
+                <a:latin typeface="Bricolage Grotesque"/>
+              </a:rPr>
+              <a:t>salida posible</a:t>
+            </a:r>
+          </a:p>
+          <a:p>
+            <a:pPr algn="l"/>
+            <a:r>
+              <a:rPr sz="1000">
+                <a:solidFill>
+                  <a:srgbClr val="20242E"/>
+                </a:solidFill>
+                <a:latin typeface="Inter"/>
+              </a:rPr>
+              <a:t>vale para la tienda</a:t>
+            </a:r>
+          </a:p>
+        </p:txBody>
+      </p:sp>
+      <p:sp>
+        <p:nvSpPr>
+          <p:cNvPr id="27" name="Tarjeta 8"/>
+          <p:cNvSpPr/>
+          <p:nvPr/>
+        </p:nvSpPr>
+        <p:spPr>
+          <a:xfrm>
+            <a:off x="457200" y="5266944"/>
+            <a:ext cx="2708910" cy="1170432"/>
+          </a:xfrm>
+          <a:prstGeom prst="roundRect">
+            <a:avLst>
+              <a:gd name="adj" fmla="val 6000"/>
+            </a:avLst>
+          </a:prstGeom>
+          <a:solidFill>
+            <a:srgbClr val="FFFFFF"/>
+          </a:solidFill>
+          <a:ln w="12700">
+            <a:solidFill>
+              <a:srgbClr val="E4E3DE"/>
+            </a:solidFill>
+          </a:ln>
+          <a:effectLst/>
+        </p:spPr>
+        <p:style>
+          <a:lnRef idx="1">
+            <a:schemeClr val="accent1"/>
+          </a:lnRef>
+          <a:fillRef idx="3">
+            <a:schemeClr val="accent1"/>
+          </a:fillRef>
+          <a:effectRef idx="2">
+            <a:schemeClr val="accent1"/>
+          </a:effectRef>
+          <a:fontRef idx="minor">
+            <a:schemeClr val="lt1"/>
+          </a:fontRef>
+        </p:style>
+        <p:txBody>
+          <a:bodyPr rtlCol="0" anchor="ctr"/>
+          <a:lstStyle/>
+          <a:p/>
+        </p:txBody>
+      </p:sp>
+      <p:sp>
+        <p:nvSpPr>
+          <p:cNvPr id="28" name="TarjetaTxt 8"/>
+          <p:cNvSpPr txBox="1"/>
+          <p:nvPr/>
+        </p:nvSpPr>
+        <p:spPr>
+          <a:xfrm>
+            <a:off x="548640" y="5321808"/>
+            <a:ext cx="2526030" cy="1060704"/>
+          </a:xfrm>
+          <a:prstGeom prst="rect">
+            <a:avLst/>
+          </a:prstGeom>
+          <a:noFill/>
+        </p:spPr>
+        <p:txBody>
+          <a:bodyPr wrap="square" anchor="t" lIns="45720" rIns="45720" tIns="27432" bIns="27432">
+            <a:normAutofit/>
+          </a:bodyPr>
+          <a:lstStyle/>
+          <a:p>
+            <a:pPr algn="l"/>
+            <a:r>
+              <a:rPr sz="1100" b="1">
+                <a:solidFill>
+                  <a:srgbClr val="157355"/>
+                </a:solidFill>
+                <a:latin typeface="Bricolage Grotesque"/>
+              </a:rPr>
+              <a:t>salida posible</a:t>
+            </a:r>
+          </a:p>
+          <a:p>
+            <a:pPr algn="l"/>
+            <a:r>
+              <a:rPr sz="1000">
+                <a:solidFill>
+                  <a:srgbClr val="20242E"/>
+                </a:solidFill>
+                <a:latin typeface="Inter"/>
+              </a:rPr>
+              <a:t>nada de nada</a:t>
+            </a:r>
+          </a:p>
+        </p:txBody>
+      </p:sp>
+    </p:spTree>
+  </p:cSld>
+  <p:clrMapOvr>
+    <a:masterClrMapping/>
+  </p:clrMapOvr>
+</p:sld>
+</file>
+
+<file path=ppt/slides/slide24.xml><?xml version="1.0" encoding="utf-8"?>
+<p:sld xmlns:a="http://schemas.openxmlformats.org/drawingml/2006/main" xmlns:p="http://schemas.openxmlformats.org/presentationml/2006/main" xmlns:r="http://schemas.openxmlformats.org/officeDocument/2006/relationships">
+  <p:cSld>
+    <p:spTree>
+      <p:nvGrpSpPr>
+        <p:cNvPr id="1" name=""/>
+        <p:cNvGrpSpPr/>
+        <p:nvPr/>
+      </p:nvGrpSpPr>
+      <p:grpSpPr/>
+      <p:sp>
+        <p:nvSpPr>
+          <p:cNvPr id="2" name="Fondo"/>
+          <p:cNvSpPr/>
+          <p:nvPr/>
+        </p:nvSpPr>
+        <p:spPr>
+          <a:xfrm>
+            <a:off x="0" y="0"/>
+            <a:ext cx="12191695" cy="6858000"/>
+          </a:xfrm>
+          <a:prstGeom prst="rect">
+            <a:avLst/>
+          </a:prstGeom>
+          <a:solidFill>
+            <a:srgbClr val="FCFBF8"/>
+          </a:solidFill>
+          <a:ln>
+            <a:noFill/>
+          </a:ln>
+          <a:effectLst/>
+        </p:spPr>
+        <p:style>
+          <a:lnRef idx="1">
+            <a:schemeClr val="accent1"/>
+          </a:lnRef>
+          <a:fillRef idx="3">
+            <a:schemeClr val="accent1"/>
+          </a:fillRef>
+          <a:effectRef idx="2">
+            <a:schemeClr val="accent1"/>
+          </a:effectRef>
+          <a:fontRef idx="minor">
+            <a:schemeClr val="lt1"/>
+          </a:fontRef>
+        </p:style>
+        <p:txBody>
+          <a:bodyPr rtlCol="0" anchor="ctr"/>
+          <a:lstStyle/>
+          <a:p/>
+        </p:txBody>
+      </p:sp>
+      <p:sp>
+        <p:nvSpPr>
+          <p:cNvPr id="3" name="Cabecera"/>
+          <p:cNvSpPr/>
+          <p:nvPr/>
+        </p:nvSpPr>
+        <p:spPr>
+          <a:xfrm>
+            <a:off x="0" y="0"/>
+            <a:ext cx="12191695" cy="1078992"/>
+          </a:xfrm>
+          <a:prstGeom prst="rect">
+            <a:avLst/>
+          </a:prstGeom>
+          <a:solidFill>
+            <a:srgbClr val="1E9E74"/>
+          </a:solidFill>
+          <a:ln>
+            <a:noFill/>
+          </a:ln>
+          <a:effectLst/>
+        </p:spPr>
+        <p:style>
+          <a:lnRef idx="1">
+            <a:schemeClr val="accent1"/>
+          </a:lnRef>
+          <a:fillRef idx="3">
+            <a:schemeClr val="accent1"/>
+          </a:fillRef>
+          <a:effectRef idx="2">
+            <a:schemeClr val="accent1"/>
+          </a:effectRef>
+          <a:fontRef idx="minor">
+            <a:schemeClr val="lt1"/>
+          </a:fontRef>
+        </p:style>
+        <p:txBody>
+          <a:bodyPr rtlCol="0" anchor="ctr"/>
+          <a:lstStyle/>
+          <a:p/>
+        </p:txBody>
+      </p:sp>
+      <p:sp>
+        <p:nvSpPr>
+          <p:cNvPr id="4" name="Chip"/>
+          <p:cNvSpPr/>
+          <p:nvPr/>
+        </p:nvSpPr>
+        <p:spPr>
+          <a:xfrm>
+            <a:off x="457200" y="182880"/>
+            <a:ext cx="3017520" cy="292608"/>
+          </a:xfrm>
+          <a:prstGeom prst="roundRect">
+            <a:avLst>
+              <a:gd name="adj" fmla="val 50000"/>
+            </a:avLst>
+          </a:prstGeom>
+          <a:solidFill>
+            <a:srgbClr val="FFFFFF"/>
+          </a:solidFill>
+          <a:ln>
+            <a:noFill/>
+          </a:ln>
+          <a:effectLst/>
+        </p:spPr>
+        <p:style>
+          <a:lnRef idx="1">
+            <a:schemeClr val="accent1"/>
+          </a:lnRef>
+          <a:fillRef idx="3">
+            <a:schemeClr val="accent1"/>
+          </a:fillRef>
+          <a:effectRef idx="2">
+            <a:schemeClr val="accent1"/>
+          </a:effectRef>
+          <a:fontRef idx="minor">
+            <a:schemeClr val="lt1"/>
+          </a:fontRef>
+        </p:style>
+        <p:txBody>
+          <a:bodyPr rtlCol="0" anchor="ctr"/>
+          <a:lstStyle/>
+          <a:p/>
+        </p:txBody>
+      </p:sp>
+      <p:sp>
+        <p:nvSpPr>
+          <p:cNvPr id="5" name="ChipTxt"/>
+          <p:cNvSpPr txBox="1"/>
+          <p:nvPr/>
+        </p:nvSpPr>
+        <p:spPr>
+          <a:xfrm>
+            <a:off x="457200" y="173736"/>
+            <a:ext cx="3017520" cy="310896"/>
+          </a:xfrm>
+          <a:prstGeom prst="rect">
+            <a:avLst/>
+          </a:prstGeom>
+          <a:noFill/>
+        </p:spPr>
+        <p:txBody>
+          <a:bodyPr wrap="square" anchor="ctr" lIns="45720" rIns="45720" tIns="27432" bIns="27432">
+            <a:normAutofit/>
+          </a:bodyPr>
+          <a:lstStyle/>
+          <a:p>
+            <a:pPr algn="ctr"/>
+            <a:r>
+              <a:rPr sz="950" b="1">
+                <a:solidFill>
+                  <a:srgbClr val="157355"/>
+                </a:solidFill>
+                <a:latin typeface="Inter"/>
+              </a:rPr>
+              <a:t>RETO 8 · SIMULATIE MET BEPERKING</a:t>
+            </a:r>
+          </a:p>
+        </p:txBody>
+      </p:sp>
+      <p:sp>
+        <p:nvSpPr>
+          <p:cNvPr id="6" name="Titulo"/>
+          <p:cNvSpPr txBox="1"/>
+          <p:nvPr/>
+        </p:nvSpPr>
+        <p:spPr>
+          <a:xfrm>
+            <a:off x="457200" y="502920"/>
+            <a:ext cx="8412480" cy="475488"/>
+          </a:xfrm>
+          <a:prstGeom prst="rect">
+            <a:avLst/>
+          </a:prstGeom>
+          <a:noFill/>
+        </p:spPr>
+        <p:txBody>
+          <a:bodyPr wrap="square" anchor="t" lIns="45720" rIns="45720" tIns="27432" bIns="27432">
+            <a:normAutofit/>
+          </a:bodyPr>
+          <a:lstStyle/>
+          <a:p>
+            <a:pPr algn="l"/>
+            <a:r>
+              <a:rPr sz="2700" b="1">
+                <a:solidFill>
+                  <a:srgbClr val="FFFFFF"/>
+                </a:solidFill>
+                <a:latin typeface="Bricolage Grotesque"/>
+              </a:rPr>
+              <a:t>El cliente imposible</a:t>
+            </a:r>
+          </a:p>
+        </p:txBody>
+      </p:sp>
+      <p:sp>
+        <p:nvSpPr>
+          <p:cNvPr id="7" name="Badges"/>
+          <p:cNvSpPr txBox="1"/>
+          <p:nvPr/>
+        </p:nvSpPr>
+        <p:spPr>
+          <a:xfrm>
+            <a:off x="9052560" y="256032"/>
+            <a:ext cx="2651760" cy="640080"/>
+          </a:xfrm>
+          <a:prstGeom prst="rect">
+            <a:avLst/>
+          </a:prstGeom>
+          <a:noFill/>
+        </p:spPr>
+        <p:txBody>
+          <a:bodyPr wrap="square" anchor="t" lIns="45720" rIns="45720" tIns="27432" bIns="27432">
+            <a:normAutofit/>
+          </a:bodyPr>
+          <a:lstStyle/>
+          <a:p>
+            <a:pPr algn="r"/>
+            <a:r>
+              <a:rPr sz="1000">
+                <a:solidFill>
+                  <a:srgbClr val="E4F4EE"/>
+                </a:solidFill>
+                <a:latin typeface="Inter"/>
+              </a:rPr>
+              <a:t>👥 En parejas</a:t>
+            </a:r>
+          </a:p>
+          <a:p>
+            <a:pPr algn="r"/>
+            <a:r>
+              <a:rPr sz="1000">
+                <a:solidFill>
+                  <a:srgbClr val="E4F4EE"/>
+                </a:solidFill>
+                <a:latin typeface="Inter"/>
+              </a:rPr>
+              <a:t>± 12 min · ★★★</a:t>
+            </a:r>
+          </a:p>
+        </p:txBody>
+      </p:sp>
+      <p:sp>
+        <p:nvSpPr>
+          <p:cNvPr id="8" name="Gancho"/>
+          <p:cNvSpPr txBox="1"/>
+          <p:nvPr/>
+        </p:nvSpPr>
+        <p:spPr>
+          <a:xfrm>
+            <a:off x="457200" y="1225296"/>
+            <a:ext cx="11274552" cy="566928"/>
+          </a:xfrm>
+          <a:prstGeom prst="rect">
+            <a:avLst/>
+          </a:prstGeom>
+          <a:noFill/>
+        </p:spPr>
+        <p:txBody>
+          <a:bodyPr wrap="square" anchor="t" lIns="45720" rIns="45720" tIns="27432" bIns="27432">
+            <a:normAutofit/>
+          </a:bodyPr>
+          <a:lstStyle/>
+          <a:p>
+            <a:pPr algn="l"/>
+            <a:r>
+              <a:rPr sz="1600" b="1">
+                <a:solidFill>
+                  <a:srgbClr val="157355"/>
+                </a:solidFill>
+                <a:latin typeface="Bricolage Grotesque"/>
+              </a:rPr>
+              <a:t>El vendedor tiene que adivinar qué tipo de cliente le ha tocado.</a:t>
+            </a:r>
+          </a:p>
+          <a:p>
+            <a:pPr algn="l"/>
+            <a:r>
+              <a:rPr sz="1100" i="1">
+                <a:solidFill>
+                  <a:srgbClr val="6A6E78"/>
+                </a:solidFill>
+                <a:latin typeface="Inter"/>
+              </a:rPr>
+              <a:t>De verkoper moet raden wat voor klant hij tegenover zich heeft.</a:t>
+            </a:r>
+          </a:p>
+        </p:txBody>
+      </p:sp>
+      <p:sp>
+        <p:nvSpPr>
+          <p:cNvPr id="9" name="ReglaCaja"/>
+          <p:cNvSpPr/>
+          <p:nvPr/>
+        </p:nvSpPr>
+        <p:spPr>
+          <a:xfrm>
+            <a:off x="457200" y="1847088"/>
+            <a:ext cx="11274552" cy="658368"/>
+          </a:xfrm>
+          <a:prstGeom prst="roundRect">
+            <a:avLst>
+              <a:gd name="adj" fmla="val 5000"/>
+            </a:avLst>
+          </a:prstGeom>
+          <a:solidFill>
+            <a:srgbClr val="FBF3D6"/>
+          </a:solidFill>
+          <a:ln>
+            <a:noFill/>
+          </a:ln>
+          <a:effectLst/>
+        </p:spPr>
+        <p:style>
+          <a:lnRef idx="1">
+            <a:schemeClr val="accent1"/>
+          </a:lnRef>
+          <a:fillRef idx="3">
+            <a:schemeClr val="accent1"/>
+          </a:fillRef>
+          <a:effectRef idx="2">
+            <a:schemeClr val="accent1"/>
+          </a:effectRef>
+          <a:fontRef idx="minor">
+            <a:schemeClr val="lt1"/>
+          </a:fontRef>
+        </p:style>
+        <p:txBody>
+          <a:bodyPr rtlCol="0" anchor="ctr"/>
+          <a:lstStyle/>
+          <a:p/>
+        </p:txBody>
+      </p:sp>
+      <p:sp>
+        <p:nvSpPr>
+          <p:cNvPr id="10" name="ReglaTxt"/>
+          <p:cNvSpPr txBox="1"/>
+          <p:nvPr/>
+        </p:nvSpPr>
+        <p:spPr>
+          <a:xfrm>
+            <a:off x="603504" y="1883664"/>
+            <a:ext cx="10972800" cy="585216"/>
+          </a:xfrm>
+          <a:prstGeom prst="rect">
+            <a:avLst/>
+          </a:prstGeom>
+          <a:noFill/>
+        </p:spPr>
+        <p:txBody>
+          <a:bodyPr wrap="square" anchor="t" lIns="45720" rIns="45720" tIns="27432" bIns="27432">
+            <a:normAutofit/>
+          </a:bodyPr>
+          <a:lstStyle/>
+          <a:p>
+            <a:pPr algn="l"/>
+            <a:r>
+              <a:rPr sz="850" b="1">
+                <a:solidFill>
+                  <a:srgbClr val="B7860B"/>
+                </a:solidFill>
+                <a:latin typeface="Inter"/>
+              </a:rPr>
+              <a:t>LA REGLA DEL RETO</a:t>
+            </a:r>
+          </a:p>
+          <a:p>
+            <a:pPr algn="l"/>
+            <a:r>
+              <a:rPr sz="1100">
+                <a:solidFill>
+                  <a:srgbClr val="20242E"/>
+                </a:solidFill>
+                <a:latin typeface="Inter"/>
+              </a:rPr>
+              <a:t>Je mag je type niet benoemen en niet overdrijven tot karikatuur. Het moet uit je vragen en je reacties blijken.</a:t>
+            </a:r>
+          </a:p>
+        </p:txBody>
+      </p:sp>
+      <p:sp>
+        <p:nvSpPr>
+          <p:cNvPr id="11" name="Tarjeta 0"/>
+          <p:cNvSpPr/>
+          <p:nvPr/>
+        </p:nvSpPr>
+        <p:spPr>
+          <a:xfrm>
+            <a:off x="457200" y="2670048"/>
+            <a:ext cx="2708910" cy="1170432"/>
+          </a:xfrm>
+          <a:prstGeom prst="roundRect">
+            <a:avLst>
+              <a:gd name="adj" fmla="val 6000"/>
+            </a:avLst>
+          </a:prstGeom>
+          <a:solidFill>
+            <a:srgbClr val="FFFFFF"/>
+          </a:solidFill>
+          <a:ln w="12700">
+            <a:solidFill>
+              <a:srgbClr val="E4E3DE"/>
+            </a:solidFill>
+          </a:ln>
+          <a:effectLst/>
+        </p:spPr>
+        <p:style>
+          <a:lnRef idx="1">
+            <a:schemeClr val="accent1"/>
+          </a:lnRef>
+          <a:fillRef idx="3">
+            <a:schemeClr val="accent1"/>
+          </a:fillRef>
+          <a:effectRef idx="2">
+            <a:schemeClr val="accent1"/>
+          </a:effectRef>
+          <a:fontRef idx="minor">
+            <a:schemeClr val="lt1"/>
+          </a:fontRef>
+        </p:style>
+        <p:txBody>
+          <a:bodyPr rtlCol="0" anchor="ctr"/>
+          <a:lstStyle/>
+          <a:p/>
+        </p:txBody>
+      </p:sp>
+      <p:sp>
+        <p:nvSpPr>
+          <p:cNvPr id="12" name="TarjetaTxt 0"/>
+          <p:cNvSpPr txBox="1"/>
+          <p:nvPr/>
+        </p:nvSpPr>
+        <p:spPr>
+          <a:xfrm>
+            <a:off x="548640" y="2724912"/>
+            <a:ext cx="2526030" cy="1060704"/>
+          </a:xfrm>
+          <a:prstGeom prst="rect">
+            <a:avLst/>
+          </a:prstGeom>
+          <a:noFill/>
+        </p:spPr>
+        <p:txBody>
+          <a:bodyPr wrap="square" anchor="t" lIns="45720" rIns="45720" tIns="27432" bIns="27432">
+            <a:normAutofit/>
+          </a:bodyPr>
+          <a:lstStyle/>
+          <a:p>
+            <a:pPr algn="l"/>
+            <a:r>
+              <a:rPr sz="1100" b="1">
+                <a:solidFill>
+                  <a:srgbClr val="157355"/>
+                </a:solidFill>
+                <a:latin typeface="Bricolage Grotesque"/>
+              </a:rPr>
+              <a:t>el indeciso</a:t>
+            </a:r>
+          </a:p>
+          <a:p>
+            <a:pPr algn="l"/>
+            <a:r>
+              <a:rPr sz="1000">
+                <a:solidFill>
+                  <a:srgbClr val="20242E"/>
+                </a:solidFill>
+                <a:latin typeface="Inter"/>
+              </a:rPr>
+              <a:t>Todo te gusta y nada te convence. Preguntas mucho.</a:t>
+            </a:r>
+          </a:p>
+        </p:txBody>
+      </p:sp>
+      <p:sp>
+        <p:nvSpPr>
+          <p:cNvPr id="13" name="Tarjeta 1"/>
+          <p:cNvSpPr/>
+          <p:nvPr/>
+        </p:nvSpPr>
+        <p:spPr>
+          <a:xfrm>
+            <a:off x="3312414" y="2670048"/>
+            <a:ext cx="2708910" cy="1170432"/>
+          </a:xfrm>
+          <a:prstGeom prst="roundRect">
+            <a:avLst>
+              <a:gd name="adj" fmla="val 6000"/>
+            </a:avLst>
+          </a:prstGeom>
+          <a:solidFill>
+            <a:srgbClr val="FFFFFF"/>
+          </a:solidFill>
+          <a:ln w="12700">
+            <a:solidFill>
+              <a:srgbClr val="E4E3DE"/>
+            </a:solidFill>
+          </a:ln>
+          <a:effectLst/>
+        </p:spPr>
+        <p:style>
+          <a:lnRef idx="1">
+            <a:schemeClr val="accent1"/>
+          </a:lnRef>
+          <a:fillRef idx="3">
+            <a:schemeClr val="accent1"/>
+          </a:fillRef>
+          <a:effectRef idx="2">
+            <a:schemeClr val="accent1"/>
+          </a:effectRef>
+          <a:fontRef idx="minor">
+            <a:schemeClr val="lt1"/>
+          </a:fontRef>
+        </p:style>
+        <p:txBody>
+          <a:bodyPr rtlCol="0" anchor="ctr"/>
+          <a:lstStyle/>
+          <a:p/>
+        </p:txBody>
+      </p:sp>
+      <p:sp>
+        <p:nvSpPr>
+          <p:cNvPr id="14" name="TarjetaTxt 1"/>
+          <p:cNvSpPr txBox="1"/>
+          <p:nvPr/>
+        </p:nvSpPr>
+        <p:spPr>
+          <a:xfrm>
+            <a:off x="3403854" y="2724912"/>
+            <a:ext cx="2526030" cy="1060704"/>
+          </a:xfrm>
+          <a:prstGeom prst="rect">
+            <a:avLst/>
+          </a:prstGeom>
+          <a:noFill/>
+        </p:spPr>
+        <p:txBody>
+          <a:bodyPr wrap="square" anchor="t" lIns="45720" rIns="45720" tIns="27432" bIns="27432">
+            <a:normAutofit/>
+          </a:bodyPr>
+          <a:lstStyle/>
+          <a:p>
+            <a:pPr algn="l"/>
+            <a:r>
+              <a:rPr sz="1100" b="1">
+                <a:solidFill>
+                  <a:srgbClr val="157355"/>
+                </a:solidFill>
+                <a:latin typeface="Bricolage Grotesque"/>
+              </a:rPr>
+              <a:t>el ahorrador</a:t>
+            </a:r>
+          </a:p>
+          <a:p>
+            <a:pPr algn="l"/>
+            <a:r>
+              <a:rPr sz="1000">
+                <a:solidFill>
+                  <a:srgbClr val="20242E"/>
+                </a:solidFill>
+                <a:latin typeface="Inter"/>
+              </a:rPr>
+              <a:t>Solo miras el precio. Siempre buscas algo más barato.</a:t>
+            </a:r>
+          </a:p>
+        </p:txBody>
+      </p:sp>
+      <p:sp>
+        <p:nvSpPr>
+          <p:cNvPr id="15" name="Tarjeta 2"/>
+          <p:cNvSpPr/>
+          <p:nvPr/>
+        </p:nvSpPr>
+        <p:spPr>
+          <a:xfrm>
+            <a:off x="6167628" y="2670048"/>
+            <a:ext cx="2708910" cy="1170432"/>
+          </a:xfrm>
+          <a:prstGeom prst="roundRect">
+            <a:avLst>
+              <a:gd name="adj" fmla="val 6000"/>
+            </a:avLst>
+          </a:prstGeom>
+          <a:solidFill>
+            <a:srgbClr val="FFFFFF"/>
+          </a:solidFill>
+          <a:ln w="12700">
+            <a:solidFill>
+              <a:srgbClr val="E4E3DE"/>
+            </a:solidFill>
+          </a:ln>
+          <a:effectLst/>
+        </p:spPr>
+        <p:style>
+          <a:lnRef idx="1">
+            <a:schemeClr val="accent1"/>
+          </a:lnRef>
+          <a:fillRef idx="3">
+            <a:schemeClr val="accent1"/>
+          </a:fillRef>
+          <a:effectRef idx="2">
+            <a:schemeClr val="accent1"/>
+          </a:effectRef>
+          <a:fontRef idx="minor">
+            <a:schemeClr val="lt1"/>
+          </a:fontRef>
+        </p:style>
+        <p:txBody>
+          <a:bodyPr rtlCol="0" anchor="ctr"/>
+          <a:lstStyle/>
+          <a:p/>
+        </p:txBody>
+      </p:sp>
+      <p:sp>
+        <p:nvSpPr>
+          <p:cNvPr id="16" name="TarjetaTxt 2"/>
+          <p:cNvSpPr txBox="1"/>
+          <p:nvPr/>
+        </p:nvSpPr>
+        <p:spPr>
+          <a:xfrm>
+            <a:off x="6259068" y="2724912"/>
+            <a:ext cx="2526030" cy="1060704"/>
+          </a:xfrm>
+          <a:prstGeom prst="rect">
+            <a:avLst/>
+          </a:prstGeom>
+          <a:noFill/>
+        </p:spPr>
+        <p:txBody>
+          <a:bodyPr wrap="square" anchor="t" lIns="45720" rIns="45720" tIns="27432" bIns="27432">
+            <a:normAutofit/>
+          </a:bodyPr>
+          <a:lstStyle/>
+          <a:p>
+            <a:pPr algn="l"/>
+            <a:r>
+              <a:rPr sz="1100" b="1">
+                <a:solidFill>
+                  <a:srgbClr val="157355"/>
+                </a:solidFill>
+                <a:latin typeface="Bricolage Grotesque"/>
+              </a:rPr>
+              <a:t>el que tiene prisa</a:t>
+            </a:r>
+          </a:p>
+          <a:p>
+            <a:pPr algn="l"/>
+            <a:r>
+              <a:rPr sz="1000">
+                <a:solidFill>
+                  <a:srgbClr val="20242E"/>
+                </a:solidFill>
+                <a:latin typeface="Inter"/>
+              </a:rPr>
+              <a:t>Quieres salir en dos minutos. Nada de charla.</a:t>
+            </a:r>
+          </a:p>
+        </p:txBody>
+      </p:sp>
+      <p:sp>
+        <p:nvSpPr>
+          <p:cNvPr id="17" name="Tarjeta 3"/>
+          <p:cNvSpPr/>
+          <p:nvPr/>
+        </p:nvSpPr>
+        <p:spPr>
+          <a:xfrm>
+            <a:off x="9022842" y="2670048"/>
+            <a:ext cx="2708910" cy="1170432"/>
+          </a:xfrm>
+          <a:prstGeom prst="roundRect">
+            <a:avLst>
+              <a:gd name="adj" fmla="val 6000"/>
+            </a:avLst>
+          </a:prstGeom>
+          <a:solidFill>
+            <a:srgbClr val="FFFFFF"/>
+          </a:solidFill>
+          <a:ln w="12700">
+            <a:solidFill>
+              <a:srgbClr val="E4E3DE"/>
+            </a:solidFill>
+          </a:ln>
+          <a:effectLst/>
+        </p:spPr>
+        <p:style>
+          <a:lnRef idx="1">
+            <a:schemeClr val="accent1"/>
+          </a:lnRef>
+          <a:fillRef idx="3">
+            <a:schemeClr val="accent1"/>
+          </a:fillRef>
+          <a:effectRef idx="2">
+            <a:schemeClr val="accent1"/>
+          </a:effectRef>
+          <a:fontRef idx="minor">
+            <a:schemeClr val="lt1"/>
+          </a:fontRef>
+        </p:style>
+        <p:txBody>
+          <a:bodyPr rtlCol="0" anchor="ctr"/>
+          <a:lstStyle/>
+          <a:p/>
+        </p:txBody>
+      </p:sp>
+      <p:sp>
+        <p:nvSpPr>
+          <p:cNvPr id="18" name="TarjetaTxt 3"/>
+          <p:cNvSpPr txBox="1"/>
+          <p:nvPr/>
+        </p:nvSpPr>
+        <p:spPr>
+          <a:xfrm>
+            <a:off x="9114282" y="2724912"/>
+            <a:ext cx="2526030" cy="1060704"/>
+          </a:xfrm>
+          <a:prstGeom prst="rect">
+            <a:avLst/>
+          </a:prstGeom>
+          <a:noFill/>
+        </p:spPr>
+        <p:txBody>
+          <a:bodyPr wrap="square" anchor="t" lIns="45720" rIns="45720" tIns="27432" bIns="27432">
+            <a:normAutofit/>
+          </a:bodyPr>
+          <a:lstStyle/>
+          <a:p>
+            <a:pPr algn="l"/>
+            <a:r>
+              <a:rPr sz="1100" b="1">
+                <a:solidFill>
+                  <a:srgbClr val="157355"/>
+                </a:solidFill>
+                <a:latin typeface="Bricolage Grotesque"/>
+              </a:rPr>
+              <a:t>el desconfiado</a:t>
+            </a:r>
+          </a:p>
+          <a:p>
+            <a:pPr algn="l"/>
+            <a:r>
+              <a:rPr sz="1000">
+                <a:solidFill>
+                  <a:srgbClr val="20242E"/>
+                </a:solidFill>
+                <a:latin typeface="Inter"/>
+              </a:rPr>
+              <a:t>Quieres saber de dónde viene todo y si se puede devolver.</a:t>
+            </a:r>
+          </a:p>
+        </p:txBody>
+      </p:sp>
+      <p:sp>
+        <p:nvSpPr>
+          <p:cNvPr id="19" name="Tarjeta 4"/>
+          <p:cNvSpPr/>
+          <p:nvPr/>
+        </p:nvSpPr>
+        <p:spPr>
+          <a:xfrm>
+            <a:off x="457200" y="3968496"/>
+            <a:ext cx="2708910" cy="1170432"/>
+          </a:xfrm>
+          <a:prstGeom prst="roundRect">
+            <a:avLst>
+              <a:gd name="adj" fmla="val 6000"/>
+            </a:avLst>
+          </a:prstGeom>
+          <a:solidFill>
+            <a:srgbClr val="FFFFFF"/>
+          </a:solidFill>
+          <a:ln w="12700">
+            <a:solidFill>
+              <a:srgbClr val="E4E3DE"/>
+            </a:solidFill>
+          </a:ln>
+          <a:effectLst/>
+        </p:spPr>
+        <p:style>
+          <a:lnRef idx="1">
+            <a:schemeClr val="accent1"/>
+          </a:lnRef>
+          <a:fillRef idx="3">
+            <a:schemeClr val="accent1"/>
+          </a:fillRef>
+          <a:effectRef idx="2">
+            <a:schemeClr val="accent1"/>
+          </a:effectRef>
+          <a:fontRef idx="minor">
+            <a:schemeClr val="lt1"/>
+          </a:fontRef>
+        </p:style>
+        <p:txBody>
+          <a:bodyPr rtlCol="0" anchor="ctr"/>
+          <a:lstStyle/>
+          <a:p/>
+        </p:txBody>
+      </p:sp>
+      <p:sp>
+        <p:nvSpPr>
+          <p:cNvPr id="20" name="TarjetaTxt 4"/>
+          <p:cNvSpPr txBox="1"/>
+          <p:nvPr/>
+        </p:nvSpPr>
+        <p:spPr>
+          <a:xfrm>
+            <a:off x="548640" y="4023360"/>
+            <a:ext cx="2526030" cy="1060704"/>
+          </a:xfrm>
+          <a:prstGeom prst="rect">
+            <a:avLst/>
+          </a:prstGeom>
+          <a:noFill/>
+        </p:spPr>
+        <p:txBody>
+          <a:bodyPr wrap="square" anchor="t" lIns="45720" rIns="45720" tIns="27432" bIns="27432">
+            <a:normAutofit/>
+          </a:bodyPr>
+          <a:lstStyle/>
+          <a:p>
+            <a:pPr algn="l"/>
+            <a:r>
+              <a:rPr sz="1100" b="1">
+                <a:solidFill>
+                  <a:srgbClr val="157355"/>
+                </a:solidFill>
+                <a:latin typeface="Bricolage Grotesque"/>
+              </a:rPr>
+              <a:t>el que va a regalar</a:t>
+            </a:r>
+          </a:p>
+          <a:p>
+            <a:pPr algn="l"/>
+            <a:r>
+              <a:rPr sz="1000">
+                <a:solidFill>
+                  <a:srgbClr val="20242E"/>
+                </a:solidFill>
+                <a:latin typeface="Inter"/>
+              </a:rPr>
+              <a:t>No es para ti. No sabes la talla del otro.</a:t>
+            </a:r>
+          </a:p>
+        </p:txBody>
+      </p:sp>
+      <p:sp>
+        <p:nvSpPr>
+          <p:cNvPr id="21" name="Tarjeta 5"/>
+          <p:cNvSpPr/>
+          <p:nvPr/>
+        </p:nvSpPr>
+        <p:spPr>
+          <a:xfrm>
+            <a:off x="3312414" y="3968496"/>
+            <a:ext cx="2708910" cy="1170432"/>
+          </a:xfrm>
+          <a:prstGeom prst="roundRect">
+            <a:avLst>
+              <a:gd name="adj" fmla="val 6000"/>
+            </a:avLst>
+          </a:prstGeom>
+          <a:solidFill>
+            <a:srgbClr val="FFFFFF"/>
+          </a:solidFill>
+          <a:ln w="12700">
+            <a:solidFill>
+              <a:srgbClr val="E4E3DE"/>
+            </a:solidFill>
+          </a:ln>
+          <a:effectLst/>
+        </p:spPr>
+        <p:style>
+          <a:lnRef idx="1">
+            <a:schemeClr val="accent1"/>
+          </a:lnRef>
+          <a:fillRef idx="3">
+            <a:schemeClr val="accent1"/>
+          </a:fillRef>
+          <a:effectRef idx="2">
+            <a:schemeClr val="accent1"/>
+          </a:effectRef>
+          <a:fontRef idx="minor">
+            <a:schemeClr val="lt1"/>
+          </a:fontRef>
+        </p:style>
+        <p:txBody>
+          <a:bodyPr rtlCol="0" anchor="ctr"/>
+          <a:lstStyle/>
+          <a:p/>
+        </p:txBody>
+      </p:sp>
+      <p:sp>
+        <p:nvSpPr>
+          <p:cNvPr id="22" name="TarjetaTxt 5"/>
+          <p:cNvSpPr txBox="1"/>
+          <p:nvPr/>
+        </p:nvSpPr>
+        <p:spPr>
+          <a:xfrm>
+            <a:off x="3403854" y="4023360"/>
+            <a:ext cx="2526030" cy="1060704"/>
+          </a:xfrm>
+          <a:prstGeom prst="rect">
+            <a:avLst/>
+          </a:prstGeom>
+          <a:noFill/>
+        </p:spPr>
+        <p:txBody>
+          <a:bodyPr wrap="square" anchor="t" lIns="45720" rIns="45720" tIns="27432" bIns="27432">
+            <a:normAutofit/>
+          </a:bodyPr>
+          <a:lstStyle/>
+          <a:p>
+            <a:pPr algn="l"/>
+            <a:r>
+              <a:rPr sz="1100" b="1">
+                <a:solidFill>
+                  <a:srgbClr val="157355"/>
+                </a:solidFill>
+                <a:latin typeface="Bricolage Grotesque"/>
+              </a:rPr>
+              <a:t>Vendedor/a</a:t>
+            </a:r>
+          </a:p>
+          <a:p>
+            <a:pPr algn="l"/>
+            <a:r>
+              <a:rPr sz="1000">
+                <a:solidFill>
+                  <a:srgbClr val="20242E"/>
+                </a:solidFill>
+                <a:latin typeface="Inter"/>
+              </a:rPr>
+              <a:t>¿Le ayudo?</a:t>
+            </a:r>
+          </a:p>
+        </p:txBody>
+      </p:sp>
+      <p:sp>
+        <p:nvSpPr>
+          <p:cNvPr id="23" name="Tarjeta 6"/>
+          <p:cNvSpPr/>
+          <p:nvPr/>
+        </p:nvSpPr>
+        <p:spPr>
+          <a:xfrm>
+            <a:off x="6167628" y="3968496"/>
+            <a:ext cx="2708910" cy="1170432"/>
+          </a:xfrm>
+          <a:prstGeom prst="roundRect">
+            <a:avLst>
+              <a:gd name="adj" fmla="val 6000"/>
+            </a:avLst>
+          </a:prstGeom>
+          <a:solidFill>
+            <a:srgbClr val="FFFFFF"/>
+          </a:solidFill>
+          <a:ln w="12700">
+            <a:solidFill>
+              <a:srgbClr val="E4E3DE"/>
+            </a:solidFill>
+          </a:ln>
+          <a:effectLst/>
+        </p:spPr>
+        <p:style>
+          <a:lnRef idx="1">
+            <a:schemeClr val="accent1"/>
+          </a:lnRef>
+          <a:fillRef idx="3">
+            <a:schemeClr val="accent1"/>
+          </a:fillRef>
+          <a:effectRef idx="2">
+            <a:schemeClr val="accent1"/>
+          </a:effectRef>
+          <a:fontRef idx="minor">
+            <a:schemeClr val="lt1"/>
+          </a:fontRef>
+        </p:style>
+        <p:txBody>
+          <a:bodyPr rtlCol="0" anchor="ctr"/>
+          <a:lstStyle/>
+          <a:p/>
+        </p:txBody>
+      </p:sp>
+      <p:sp>
+        <p:nvSpPr>
+          <p:cNvPr id="24" name="TarjetaTxt 6"/>
+          <p:cNvSpPr txBox="1"/>
+          <p:nvPr/>
+        </p:nvSpPr>
+        <p:spPr>
+          <a:xfrm>
+            <a:off x="6259068" y="4023360"/>
+            <a:ext cx="2526030" cy="1060704"/>
+          </a:xfrm>
+          <a:prstGeom prst="rect">
+            <a:avLst/>
+          </a:prstGeom>
+          <a:noFill/>
+        </p:spPr>
+        <p:txBody>
+          <a:bodyPr wrap="square" anchor="t" lIns="45720" rIns="45720" tIns="27432" bIns="27432">
+            <a:normAutofit/>
+          </a:bodyPr>
+          <a:lstStyle/>
+          <a:p>
+            <a:pPr algn="l"/>
+            <a:r>
+              <a:rPr sz="1100" b="1">
+                <a:solidFill>
+                  <a:srgbClr val="157355"/>
+                </a:solidFill>
+                <a:latin typeface="Bricolage Grotesque"/>
+              </a:rPr>
+              <a:t>Vendedor/a</a:t>
+            </a:r>
+          </a:p>
+          <a:p>
+            <a:pPr algn="l"/>
+            <a:r>
+              <a:rPr sz="1000">
+                <a:solidFill>
+                  <a:srgbClr val="20242E"/>
+                </a:solidFill>
+                <a:latin typeface="Inter"/>
+              </a:rPr>
+              <a:t>Este le queda muy bien.</a:t>
+            </a:r>
+          </a:p>
+        </p:txBody>
+      </p:sp>
+      <p:sp>
+        <p:nvSpPr>
+          <p:cNvPr id="25" name="Tarjeta 7"/>
+          <p:cNvSpPr/>
+          <p:nvPr/>
+        </p:nvSpPr>
+        <p:spPr>
+          <a:xfrm>
+            <a:off x="9022842" y="3968496"/>
+            <a:ext cx="2708910" cy="1170432"/>
+          </a:xfrm>
+          <a:prstGeom prst="roundRect">
+            <a:avLst>
+              <a:gd name="adj" fmla="val 6000"/>
+            </a:avLst>
+          </a:prstGeom>
+          <a:solidFill>
+            <a:srgbClr val="FFFFFF"/>
+          </a:solidFill>
+          <a:ln w="12700">
+            <a:solidFill>
+              <a:srgbClr val="E4E3DE"/>
+            </a:solidFill>
+          </a:ln>
+          <a:effectLst/>
+        </p:spPr>
+        <p:style>
+          <a:lnRef idx="1">
+            <a:schemeClr val="accent1"/>
+          </a:lnRef>
+          <a:fillRef idx="3">
+            <a:schemeClr val="accent1"/>
+          </a:fillRef>
+          <a:effectRef idx="2">
+            <a:schemeClr val="accent1"/>
+          </a:effectRef>
+          <a:fontRef idx="minor">
+            <a:schemeClr val="lt1"/>
+          </a:fontRef>
+        </p:style>
+        <p:txBody>
+          <a:bodyPr rtlCol="0" anchor="ctr"/>
+          <a:lstStyle/>
+          <a:p/>
+        </p:txBody>
+      </p:sp>
+      <p:sp>
+        <p:nvSpPr>
+          <p:cNvPr id="26" name="TarjetaTxt 7"/>
+          <p:cNvSpPr txBox="1"/>
+          <p:nvPr/>
+        </p:nvSpPr>
+        <p:spPr>
+          <a:xfrm>
+            <a:off x="9114282" y="4023360"/>
+            <a:ext cx="2526030" cy="1060704"/>
+          </a:xfrm>
+          <a:prstGeom prst="rect">
+            <a:avLst/>
+          </a:prstGeom>
+          <a:noFill/>
+        </p:spPr>
+        <p:txBody>
+          <a:bodyPr wrap="square" anchor="t" lIns="45720" rIns="45720" tIns="27432" bIns="27432">
+            <a:normAutofit/>
+          </a:bodyPr>
+          <a:lstStyle/>
+          <a:p>
+            <a:pPr algn="l"/>
+            <a:r>
+              <a:rPr sz="1100" b="1">
+                <a:solidFill>
+                  <a:srgbClr val="157355"/>
+                </a:solidFill>
+                <a:latin typeface="Bricolage Grotesque"/>
+              </a:rPr>
+              <a:t>Vendedor/a</a:t>
+            </a:r>
+          </a:p>
+          <a:p>
+            <a:pPr algn="l"/>
+            <a:r>
+              <a:rPr sz="1000">
+                <a:solidFill>
+                  <a:srgbClr val="20242E"/>
+                </a:solidFill>
+                <a:latin typeface="Inter"/>
+              </a:rPr>
+              <a:t>Se lo puedo enseñar en otro color.</a:t>
+            </a:r>
+          </a:p>
+        </p:txBody>
+      </p:sp>
+      <p:sp>
+        <p:nvSpPr>
+          <p:cNvPr id="27" name="Tarjeta 8"/>
+          <p:cNvSpPr/>
+          <p:nvPr/>
+        </p:nvSpPr>
+        <p:spPr>
+          <a:xfrm>
+            <a:off x="457200" y="5266944"/>
+            <a:ext cx="2708910" cy="1170432"/>
+          </a:xfrm>
+          <a:prstGeom prst="roundRect">
+            <a:avLst>
+              <a:gd name="adj" fmla="val 6000"/>
+            </a:avLst>
+          </a:prstGeom>
+          <a:solidFill>
+            <a:srgbClr val="FFFFFF"/>
+          </a:solidFill>
+          <a:ln w="12700">
+            <a:solidFill>
+              <a:srgbClr val="E4E3DE"/>
+            </a:solidFill>
+          </a:ln>
+          <a:effectLst/>
+        </p:spPr>
+        <p:style>
+          <a:lnRef idx="1">
+            <a:schemeClr val="accent1"/>
+          </a:lnRef>
+          <a:fillRef idx="3">
+            <a:schemeClr val="accent1"/>
+          </a:fillRef>
+          <a:effectRef idx="2">
+            <a:schemeClr val="accent1"/>
+          </a:effectRef>
+          <a:fontRef idx="minor">
+            <a:schemeClr val="lt1"/>
+          </a:fontRef>
+        </p:style>
+        <p:txBody>
+          <a:bodyPr rtlCol="0" anchor="ctr"/>
+          <a:lstStyle/>
+          <a:p/>
+        </p:txBody>
+      </p:sp>
+      <p:sp>
+        <p:nvSpPr>
+          <p:cNvPr id="28" name="TarjetaTxt 8"/>
+          <p:cNvSpPr txBox="1"/>
+          <p:nvPr/>
+        </p:nvSpPr>
+        <p:spPr>
+          <a:xfrm>
+            <a:off x="548640" y="5321808"/>
+            <a:ext cx="2526030" cy="1060704"/>
+          </a:xfrm>
+          <a:prstGeom prst="rect">
+            <a:avLst/>
+          </a:prstGeom>
+          <a:noFill/>
+        </p:spPr>
+        <p:txBody>
+          <a:bodyPr wrap="square" anchor="t" lIns="45720" rIns="45720" tIns="27432" bIns="27432">
+            <a:normAutofit/>
+          </a:bodyPr>
+          <a:lstStyle/>
+          <a:p>
+            <a:pPr algn="l"/>
+            <a:r>
+              <a:rPr sz="1100" b="1">
+                <a:solidFill>
+                  <a:srgbClr val="157355"/>
+                </a:solidFill>
+                <a:latin typeface="Bricolage Grotesque"/>
+              </a:rPr>
+              <a:t>Vendedor/a</a:t>
+            </a:r>
+          </a:p>
+          <a:p>
+            <a:pPr algn="l"/>
+            <a:r>
+              <a:rPr sz="1000">
+                <a:solidFill>
+                  <a:srgbClr val="20242E"/>
+                </a:solidFill>
+                <a:latin typeface="Inter"/>
+              </a:rPr>
+              <a:t>¿Se lo envuelvo para regalo?</a:t>
             </a:r>
           </a:p>
         </p:txBody>

--- a/03-build/pptx/C5_U6_docente.pptx
+++ b/03-build/pptx/C5_U6_docente.pptx
@@ -38150,7 +38150,7 @@
                 </a:solidFill>
                 <a:latin typeface="Inter"/>
               </a:rPr>
-              <a:t>La compré aquí la semana pasada, me acuerdo del vendedor.</a:t>
+              <a:t>La he comprado aquí esta semana, me acuerdo del vendedor.</a:t>
             </a:r>
           </a:p>
         </p:txBody>
